--- a/samples/financial_Presentation.pptx
+++ b/samples/financial_Presentation.pptx
@@ -1691,7 +1691,7 @@
                 <a:ea typeface="Georgia" pitchFamily="34" charset="-122"/>
                 <a:cs typeface="Georgia" pitchFamily="34" charset="-120"/>
               </a:rPr>
-              <a:t>Meridian Components Inc. presents 2 revenue synergies and 3 cost synergies; procurement scale and vendor consolidation offers the highest confidence value</a:t>
+              <a:t>Meridian Components Inc. presents 3 revenue synergies and 3 cost synergies; procurement scale and vendor consolidation offers the highest confidence value</a:t>
             </a:r>
             <a:endParaRPr lang="en-US" sz="1900" dirty="0"/>
           </a:p>
@@ -1949,110 +1949,10 @@
                 <a:ea typeface="Arial" pitchFamily="34" charset="-122"/>
                 <a:cs typeface="Arial" pitchFamily="34" charset="-120"/>
               </a:rPr>
-              <a:t>2. Geographic and channel expansion</a:t>
+              <a:t>2. Pricing harmonization</a:t>
             </a:r>
             <a:endParaRPr lang="en-US" sz="1300" dirty="0"/>
           </a:p>
-        </p:txBody>
-      </p:sp>
-      <p:sp>
-        <p:nvSpPr>
-          <p:cNvPr id="12" name="Text 10"/>
-          <p:cNvSpPr/>
-          <p:nvPr/>
-        </p:nvSpPr>
-        <p:spPr>
-          <a:xfrm>
-            <a:off x="411480" y="4892040"/>
-            <a:ext cx="5577840" cy="274320"/>
-          </a:xfrm>
-          <a:prstGeom prst="rect">
-            <a:avLst/>
-          </a:prstGeom>
-          <a:noFill/>
-          <a:ln/>
-        </p:spPr>
-        <p:txBody>
-          <a:bodyPr wrap="square" rtlCol="0" anchor="ctr"/>
-          <a:lstStyle/>
-          <a:p>
-            <a:pPr indent="0" marL="0">
-              <a:buNone/>
-            </a:pPr>
-            <a:r>
-              <a:rPr lang="en-US" sz="1000" i="1" dirty="0">
-                <a:solidFill>
-                  <a:srgbClr val="63666A"/>
-                </a:solidFill>
-                <a:latin typeface="Arial" pitchFamily="34" charset="0"/>
-                <a:ea typeface="Arial" pitchFamily="34" charset="-122"/>
-                <a:cs typeface="Arial" pitchFamily="34" charset="-120"/>
-              </a:rPr>
-              <a:t>Expanded on slide 2</a:t>
-            </a:r>
-            <a:endParaRPr lang="en-US" sz="1000" dirty="0"/>
-          </a:p>
-        </p:txBody>
-      </p:sp>
-      <p:sp>
-        <p:nvSpPr>
-          <p:cNvPr id="13" name="Text 11"/>
-          <p:cNvSpPr/>
-          <p:nvPr/>
-        </p:nvSpPr>
-        <p:spPr>
-          <a:xfrm>
-            <a:off x="6172200" y="2057400"/>
-            <a:ext cx="5577840" cy="320040"/>
-          </a:xfrm>
-          <a:prstGeom prst="rect">
-            <a:avLst/>
-          </a:prstGeom>
-          <a:noFill/>
-          <a:ln/>
-        </p:spPr>
-        <p:txBody>
-          <a:bodyPr wrap="square" rtlCol="0" anchor="ctr"/>
-          <a:lstStyle/>
-          <a:p>
-            <a:pPr indent="0" marL="0">
-              <a:buNone/>
-            </a:pPr>
-            <a:r>
-              <a:rPr lang="en-US" sz="1200" b="1" spc="100" kern="0" dirty="0">
-                <a:solidFill>
-                  <a:srgbClr val="1F4CFF"/>
-                </a:solidFill>
-                <a:latin typeface="Arial" pitchFamily="34" charset="0"/>
-                <a:ea typeface="Arial" pitchFamily="34" charset="-122"/>
-                <a:cs typeface="Arial" pitchFamily="34" charset="-120"/>
-              </a:rPr>
-              <a:t>2. COST SYNERGIES</a:t>
-            </a:r>
-            <a:endParaRPr lang="en-US" sz="1200" dirty="0"/>
-          </a:p>
-        </p:txBody>
-      </p:sp>
-      <p:sp>
-        <p:nvSpPr>
-          <p:cNvPr id="14" name="Text 12"/>
-          <p:cNvSpPr/>
-          <p:nvPr/>
-        </p:nvSpPr>
-        <p:spPr>
-          <a:xfrm>
-            <a:off x="6172200" y="2423160"/>
-            <a:ext cx="5577840" cy="2194560"/>
-          </a:xfrm>
-          <a:prstGeom prst="rect">
-            <a:avLst/>
-          </a:prstGeom>
-          <a:noFill/>
-          <a:ln/>
-        </p:spPr>
-        <p:txBody>
-          <a:bodyPr wrap="square" rtlCol="0" anchor="t"/>
-          <a:lstStyle/>
           <a:p>
             <a:pPr indent="0" marL="0">
               <a:lnSpc>
@@ -2069,10 +1969,110 @@
                 <a:ea typeface="Arial" pitchFamily="34" charset="-122"/>
                 <a:cs typeface="Arial" pitchFamily="34" charset="-120"/>
               </a:rPr>
-              <a:t>3. Procurement scale and vendor consolidation</a:t>
+              <a:t>3. Key account retention program</a:t>
             </a:r>
             <a:endParaRPr lang="en-US" sz="1300" dirty="0"/>
           </a:p>
+        </p:txBody>
+      </p:sp>
+      <p:sp>
+        <p:nvSpPr>
+          <p:cNvPr id="12" name="Text 10"/>
+          <p:cNvSpPr/>
+          <p:nvPr/>
+        </p:nvSpPr>
+        <p:spPr>
+          <a:xfrm>
+            <a:off x="411480" y="4892040"/>
+            <a:ext cx="5577840" cy="274320"/>
+          </a:xfrm>
+          <a:prstGeom prst="rect">
+            <a:avLst/>
+          </a:prstGeom>
+          <a:noFill/>
+          <a:ln/>
+        </p:spPr>
+        <p:txBody>
+          <a:bodyPr wrap="square" rtlCol="0" anchor="ctr"/>
+          <a:lstStyle/>
+          <a:p>
+            <a:pPr indent="0" marL="0">
+              <a:buNone/>
+            </a:pPr>
+            <a:r>
+              <a:rPr lang="en-US" sz="1000" i="1" dirty="0">
+                <a:solidFill>
+                  <a:srgbClr val="63666A"/>
+                </a:solidFill>
+                <a:latin typeface="Arial" pitchFamily="34" charset="0"/>
+                <a:ea typeface="Arial" pitchFamily="34" charset="-122"/>
+                <a:cs typeface="Arial" pitchFamily="34" charset="-120"/>
+              </a:rPr>
+              <a:t>Expanded on slide 2</a:t>
+            </a:r>
+            <a:endParaRPr lang="en-US" sz="1000" dirty="0"/>
+          </a:p>
+        </p:txBody>
+      </p:sp>
+      <p:sp>
+        <p:nvSpPr>
+          <p:cNvPr id="13" name="Text 11"/>
+          <p:cNvSpPr/>
+          <p:nvPr/>
+        </p:nvSpPr>
+        <p:spPr>
+          <a:xfrm>
+            <a:off x="6172200" y="2057400"/>
+            <a:ext cx="5577840" cy="320040"/>
+          </a:xfrm>
+          <a:prstGeom prst="rect">
+            <a:avLst/>
+          </a:prstGeom>
+          <a:noFill/>
+          <a:ln/>
+        </p:spPr>
+        <p:txBody>
+          <a:bodyPr wrap="square" rtlCol="0" anchor="ctr"/>
+          <a:lstStyle/>
+          <a:p>
+            <a:pPr indent="0" marL="0">
+              <a:buNone/>
+            </a:pPr>
+            <a:r>
+              <a:rPr lang="en-US" sz="1200" b="1" spc="100" kern="0" dirty="0">
+                <a:solidFill>
+                  <a:srgbClr val="1F4CFF"/>
+                </a:solidFill>
+                <a:latin typeface="Arial" pitchFamily="34" charset="0"/>
+                <a:ea typeface="Arial" pitchFamily="34" charset="-122"/>
+                <a:cs typeface="Arial" pitchFamily="34" charset="-120"/>
+              </a:rPr>
+              <a:t>2. COST SYNERGIES</a:t>
+            </a:r>
+            <a:endParaRPr lang="en-US" sz="1200" dirty="0"/>
+          </a:p>
+        </p:txBody>
+      </p:sp>
+      <p:sp>
+        <p:nvSpPr>
+          <p:cNvPr id="14" name="Text 12"/>
+          <p:cNvSpPr/>
+          <p:nvPr/>
+        </p:nvSpPr>
+        <p:spPr>
+          <a:xfrm>
+            <a:off x="6172200" y="2423160"/>
+            <a:ext cx="5577840" cy="2194560"/>
+          </a:xfrm>
+          <a:prstGeom prst="rect">
+            <a:avLst/>
+          </a:prstGeom>
+          <a:noFill/>
+          <a:ln/>
+        </p:spPr>
+        <p:txBody>
+          <a:bodyPr wrap="square" rtlCol="0" anchor="t"/>
+          <a:lstStyle/>
           <a:p>
             <a:pPr indent="0" marL="0">
               <a:lnSpc>
@@ -2089,7 +2089,7 @@
                 <a:ea typeface="Arial" pitchFamily="34" charset="-122"/>
                 <a:cs typeface="Arial" pitchFamily="34" charset="-120"/>
               </a:rPr>
-              <a:t>4. Overlapping G&amp;A rationalization</a:t>
+              <a:t>4. Procurement scale and vendor consolidation</a:t>
             </a:r>
             <a:endParaRPr lang="en-US" sz="1300" dirty="0"/>
           </a:p>
@@ -2109,7 +2109,27 @@
                 <a:ea typeface="Arial" pitchFamily="34" charset="-122"/>
                 <a:cs typeface="Arial" pitchFamily="34" charset="-120"/>
               </a:rPr>
-              <a:t>5. Facility and footprint optimization</a:t>
+              <a:t>5. Margin improvement to peer levels</a:t>
+            </a:r>
+            <a:endParaRPr lang="en-US" sz="1300" dirty="0"/>
+          </a:p>
+          <a:p>
+            <a:pPr indent="0" marL="0">
+              <a:lnSpc>
+                <a:spcPts val="2600"/>
+              </a:lnSpc>
+              <a:buNone/>
+            </a:pPr>
+            <a:r>
+              <a:rPr lang="en-US" sz="1300" dirty="0">
+                <a:solidFill>
+                  <a:srgbClr val="0A1F2E"/>
+                </a:solidFill>
+                <a:latin typeface="Arial" pitchFamily="34" charset="0"/>
+                <a:ea typeface="Arial" pitchFamily="34" charset="-122"/>
+                <a:cs typeface="Arial" pitchFamily="34" charset="-120"/>
+              </a:rPr>
+              <a:t>6. Overlapping G&amp;A rationalization</a:t>
             </a:r>
             <a:endParaRPr lang="en-US" sz="1300" dirty="0"/>
           </a:p>
@@ -2338,7 +2358,7 @@
                 <a:ea typeface="Georgia" pitchFamily="34" charset="-122"/>
                 <a:cs typeface="Georgia" pitchFamily="34" charset="-120"/>
               </a:rPr>
-              <a:t>Revenue synergies center on cross selling into the combined customer base and widening the addressable footprint</a:t>
+              <a:t>Revenue synergies are ranked by fit with this transaction</a:t>
             </a:r>
             <a:endParaRPr lang="en-US" sz="1900" dirty="0"/>
           </a:p>
@@ -2592,7 +2612,7 @@
                 <a:ea typeface="Arial" pitchFamily="34" charset="-122"/>
                 <a:cs typeface="Arial" pitchFamily="34" charset="-120"/>
               </a:rPr>
-              <a:t>Meridian Components Inc.'s customers can be offered the acquirer's adjacent products, and vice versa.</a:t>
+              <a:t>Customers of each business can be offered the other's adjacent products.</a:t>
             </a:r>
             <a:endParaRPr lang="en-US" sz="1250" dirty="0"/>
           </a:p>
@@ -2672,7 +2692,7 @@
                 <a:ea typeface="Arial" pitchFamily="34" charset="-122"/>
                 <a:cs typeface="Arial" pitchFamily="34" charset="-120"/>
               </a:rPr>
-              <a:t>Geographic and channel expansion</a:t>
+              <a:t>Pricing harmonization</a:t>
             </a:r>
             <a:pPr indent="0" marL="0">
               <a:buNone/>
@@ -2686,7 +2706,7 @@
                 <a:ea typeface="Arial" pitchFamily="34" charset="-122"/>
                 <a:cs typeface="Arial" pitchFamily="34" charset="-120"/>
               </a:rPr>
-              <a:t>   Impact: Medium  |  Ease: Medium</a:t>
+              <a:t>   Impact: Medium  |  Ease: High</a:t>
             </a:r>
             <a:endParaRPr lang="en-US" sz="1500" dirty="0"/>
           </a:p>
@@ -2728,7 +2748,143 @@
                 <a:ea typeface="Arial" pitchFamily="34" charset="-122"/>
                 <a:cs typeface="Arial" pitchFamily="34" charset="-120"/>
               </a:rPr>
-              <a:t>The combined footprint opens regions and channels neither business serves alone.</a:t>
+              <a:t>Aligning price levels and discount discipline across the combined book lifts realized price.</a:t>
+            </a:r>
+            <a:endParaRPr lang="en-US" sz="1250" dirty="0"/>
+          </a:p>
+        </p:txBody>
+      </p:sp>
+      <p:sp>
+        <p:nvSpPr>
+          <p:cNvPr id="15" name="Text 13"/>
+          <p:cNvSpPr/>
+          <p:nvPr/>
+        </p:nvSpPr>
+        <p:spPr>
+          <a:xfrm>
+            <a:off x="411480" y="4242816"/>
+            <a:ext cx="384048" cy="384048"/>
+          </a:xfrm>
+          <a:prstGeom prst="ellipse">
+            <a:avLst/>
+          </a:prstGeom>
+          <a:solidFill>
+            <a:srgbClr val="00A0B0"/>
+          </a:solidFill>
+          <a:ln/>
+        </p:spPr>
+        <p:txBody>
+          <a:bodyPr wrap="square" rtlCol="0" anchor="ctr"/>
+          <a:lstStyle/>
+          <a:p>
+            <a:pPr algn="ctr" indent="0" marL="0">
+              <a:buNone/>
+            </a:pPr>
+            <a:r>
+              <a:rPr lang="en-US" sz="1300" b="1" dirty="0">
+                <a:solidFill>
+                  <a:srgbClr val="FFFFFF"/>
+                </a:solidFill>
+                <a:latin typeface="Arial" pitchFamily="34" charset="0"/>
+                <a:ea typeface="Arial" pitchFamily="34" charset="-122"/>
+                <a:cs typeface="Arial" pitchFamily="34" charset="-120"/>
+              </a:rPr>
+              <a:t>3</a:t>
+            </a:r>
+            <a:endParaRPr lang="en-US" sz="1300" dirty="0"/>
+          </a:p>
+        </p:txBody>
+      </p:sp>
+      <p:sp>
+        <p:nvSpPr>
+          <p:cNvPr id="16" name="Text 14"/>
+          <p:cNvSpPr/>
+          <p:nvPr/>
+        </p:nvSpPr>
+        <p:spPr>
+          <a:xfrm>
+            <a:off x="960120" y="4206240"/>
+            <a:ext cx="10698480" cy="384048"/>
+          </a:xfrm>
+          <a:prstGeom prst="rect">
+            <a:avLst/>
+          </a:prstGeom>
+          <a:noFill/>
+          <a:ln/>
+        </p:spPr>
+        <p:txBody>
+          <a:bodyPr wrap="square" rtlCol="0" anchor="ctr"/>
+          <a:lstStyle/>
+          <a:p>
+            <a:pPr indent="0" marL="0">
+              <a:buNone/>
+            </a:pPr>
+            <a:r>
+              <a:rPr lang="en-US" sz="1500" b="1" dirty="0">
+                <a:solidFill>
+                  <a:srgbClr val="0A1F2E"/>
+                </a:solidFill>
+                <a:latin typeface="Arial" pitchFamily="34" charset="0"/>
+                <a:ea typeface="Arial" pitchFamily="34" charset="-122"/>
+                <a:cs typeface="Arial" pitchFamily="34" charset="-120"/>
+              </a:rPr>
+              <a:t>Key account retention program</a:t>
+            </a:r>
+            <a:pPr indent="0" marL="0">
+              <a:buNone/>
+            </a:pPr>
+            <a:r>
+              <a:rPr lang="en-US" sz="1050" dirty="0">
+                <a:solidFill>
+                  <a:srgbClr val="63666A"/>
+                </a:solidFill>
+                <a:latin typeface="Arial" pitchFamily="34" charset="0"/>
+                <a:ea typeface="Arial" pitchFamily="34" charset="-122"/>
+                <a:cs typeface="Arial" pitchFamily="34" charset="-120"/>
+              </a:rPr>
+              <a:t>   Impact: High  |  Ease: Medium</a:t>
+            </a:r>
+            <a:endParaRPr lang="en-US" sz="1500" dirty="0"/>
+          </a:p>
+        </p:txBody>
+      </p:sp>
+      <p:sp>
+        <p:nvSpPr>
+          <p:cNvPr id="17" name="Text 15"/>
+          <p:cNvSpPr/>
+          <p:nvPr/>
+        </p:nvSpPr>
+        <p:spPr>
+          <a:xfrm>
+            <a:off x="960120" y="4608576"/>
+            <a:ext cx="10698480" cy="868680"/>
+          </a:xfrm>
+          <a:prstGeom prst="rect">
+            <a:avLst/>
+          </a:prstGeom>
+          <a:noFill/>
+          <a:ln/>
+        </p:spPr>
+        <p:txBody>
+          <a:bodyPr wrap="square" rtlCol="0" anchor="t"/>
+          <a:lstStyle/>
+          <a:p>
+            <a:pPr indent="0" marL="0">
+              <a:lnSpc>
+                <a:spcPts val="1800"/>
+              </a:lnSpc>
+              <a:buNone/>
+            </a:pPr>
+            <a:r>
+              <a:rPr lang="en-US" sz="1250" dirty="0">
+                <a:solidFill>
+                  <a:srgbClr val="404850"/>
+                </a:solidFill>
+                <a:latin typeface="Arial" pitchFamily="34" charset="0"/>
+                <a:ea typeface="Arial" pitchFamily="34" charset="-122"/>
+                <a:cs typeface="Arial" pitchFamily="34" charset="-120"/>
+              </a:rPr>
+              <a:t>Concentrated revenue makes protecting the largest relationships through close the first revenue priority.</a:t>
             </a:r>
             <a:endParaRPr lang="en-US" sz="1250" dirty="0"/>
           </a:p>
@@ -2918,7 +3074,7 @@
                 <a:ea typeface="Georgia" pitchFamily="34" charset="-122"/>
                 <a:cs typeface="Georgia" pitchFamily="34" charset="-120"/>
               </a:rPr>
-              <a:t>Procurement scale and overlapping G&amp;A anchor the cost case, with capture feasible inside 24 months</a:t>
+              <a:t>Cost synergies anchor the value case and are within management's control</a:t>
             </a:r>
             <a:endParaRPr lang="en-US" sz="1900" dirty="0"/>
           </a:p>
@@ -2997,7 +3153,7 @@
                 <a:ea typeface="Arial" pitchFamily="34" charset="-122"/>
                 <a:cs typeface="Arial" pitchFamily="34" charset="-120"/>
               </a:rPr>
-              <a:t>Cost synergies should anchor the value case; they are within management's direct control</a:t>
+              <a:t>Cost synergies should anchor the value case; sequence procurement first</a:t>
             </a:r>
             <a:endParaRPr lang="en-US" sz="1250" dirty="0"/>
           </a:p>
@@ -3077,7 +3233,7 @@
                 <a:ea typeface="Arial" pitchFamily="34" charset="-122"/>
                 <a:cs typeface="Arial" pitchFamily="34" charset="-120"/>
               </a:rPr>
-              <a:t>3</a:t>
+              <a:t>4</a:t>
             </a:r>
             <a:endParaRPr lang="en-US" sz="1300" dirty="0"/>
           </a:p>
@@ -3213,7 +3369,7 @@
                 <a:ea typeface="Arial" pitchFamily="34" charset="-122"/>
                 <a:cs typeface="Arial" pitchFamily="34" charset="-120"/>
               </a:rPr>
-              <a:t>4</a:t>
+              <a:t>5</a:t>
             </a:r>
             <a:endParaRPr lang="en-US" sz="1300" dirty="0"/>
           </a:p>
@@ -3252,7 +3408,7 @@
                 <a:ea typeface="Arial" pitchFamily="34" charset="-122"/>
                 <a:cs typeface="Arial" pitchFamily="34" charset="-120"/>
               </a:rPr>
-              <a:t>Overlapping G&amp;A rationalization</a:t>
+              <a:t>Margin improvement to peer levels</a:t>
             </a:r>
             <a:pPr indent="0" marL="0">
               <a:buNone/>
@@ -3266,7 +3422,7 @@
                 <a:ea typeface="Arial" pitchFamily="34" charset="-122"/>
                 <a:cs typeface="Arial" pitchFamily="34" charset="-120"/>
               </a:rPr>
-              <a:t>   Impact: Medium  |  Ease: Medium</a:t>
+              <a:t>   Impact: High  |  Ease: Medium</a:t>
             </a:r>
             <a:endParaRPr lang="en-US" sz="1500" dirty="0"/>
           </a:p>
@@ -3308,7 +3464,7 @@
                 <a:ea typeface="Arial" pitchFamily="34" charset="-122"/>
                 <a:cs typeface="Arial" pitchFamily="34" charset="-120"/>
               </a:rPr>
-              <a:t>Duplicated back office functions (finance, HR, IT) can be consolidated over 12 to 24 months.</a:t>
+              <a:t>Profitability trails typical sector levels, an addressable opportunity independent of the deal.</a:t>
             </a:r>
             <a:endParaRPr lang="en-US" sz="1250" dirty="0"/>
           </a:p>
@@ -3349,7 +3505,7 @@
                 <a:ea typeface="Arial" pitchFamily="34" charset="-122"/>
                 <a:cs typeface="Arial" pitchFamily="34" charset="-120"/>
               </a:rPr>
-              <a:t>5</a:t>
+              <a:t>6</a:t>
             </a:r>
             <a:endParaRPr lang="en-US" sz="1300" dirty="0"/>
           </a:p>
@@ -3388,7 +3544,7 @@
                 <a:ea typeface="Arial" pitchFamily="34" charset="-122"/>
                 <a:cs typeface="Arial" pitchFamily="34" charset="-120"/>
               </a:rPr>
-              <a:t>Facility and footprint optimization</a:t>
+              <a:t>Overlapping G&amp;A rationalization</a:t>
             </a:r>
             <a:pPr indent="0" marL="0">
               <a:buNone/>
@@ -3402,7 +3558,7 @@
                 <a:ea typeface="Arial" pitchFamily="34" charset="-122"/>
                 <a:cs typeface="Arial" pitchFamily="34" charset="-120"/>
               </a:rPr>
-              <a:t>   Impact: Medium  |  Ease: Low</a:t>
+              <a:t>   Impact: Medium  |  Ease: Medium</a:t>
             </a:r>
             <a:endParaRPr lang="en-US" sz="1500" dirty="0"/>
           </a:p>
@@ -3444,7 +3600,7 @@
                 <a:ea typeface="Arial" pitchFamily="34" charset="-122"/>
                 <a:cs typeface="Arial" pitchFamily="34" charset="-120"/>
               </a:rPr>
-              <a:t>Locating operations together reduces lease and logistics costs where geographies overlap.</a:t>
+              <a:t>Duplicated back office functions can be consolidated over 12 to 24 months.</a:t>
             </a:r>
             <a:endParaRPr lang="en-US" sz="1250" dirty="0"/>
           </a:p>
@@ -3936,7 +4092,7 @@
         </p:nvSpPr>
         <p:spPr>
           <a:xfrm>
-            <a:off x="4014216" y="3282696"/>
+            <a:off x="5934456" y="3282696"/>
             <a:ext cx="384048" cy="384048"/>
           </a:xfrm>
           <a:prstGeom prst="ellipse">
@@ -3977,6 +4133,47 @@
         </p:nvSpPr>
         <p:spPr>
           <a:xfrm>
+            <a:off x="4517136" y="2048256"/>
+            <a:ext cx="384048" cy="384048"/>
+          </a:xfrm>
+          <a:prstGeom prst="ellipse">
+            <a:avLst/>
+          </a:prstGeom>
+          <a:solidFill>
+            <a:srgbClr val="00A0B0"/>
+          </a:solidFill>
+          <a:ln/>
+        </p:spPr>
+        <p:txBody>
+          <a:bodyPr wrap="square" rtlCol="0" anchor="ctr"/>
+          <a:lstStyle/>
+          <a:p>
+            <a:pPr algn="ctr" indent="0" marL="0">
+              <a:buNone/>
+            </a:pPr>
+            <a:r>
+              <a:rPr lang="en-US" sz="1200" b="1" dirty="0">
+                <a:solidFill>
+                  <a:srgbClr val="FFFFFF"/>
+                </a:solidFill>
+                <a:latin typeface="Arial" pitchFamily="34" charset="0"/>
+                <a:ea typeface="Arial" pitchFamily="34" charset="-122"/>
+                <a:cs typeface="Arial" pitchFamily="34" charset="-120"/>
+              </a:rPr>
+              <a:t>3</a:t>
+            </a:r>
+            <a:endParaRPr lang="en-US" sz="1200" dirty="0"/>
+          </a:p>
+        </p:txBody>
+      </p:sp>
+      <p:sp>
+        <p:nvSpPr>
+          <p:cNvPr id="16" name="Text 14"/>
+          <p:cNvSpPr/>
+          <p:nvPr/>
+        </p:nvSpPr>
+        <p:spPr>
+          <a:xfrm>
             <a:off x="5934456" y="2048256"/>
             <a:ext cx="384048" cy="384048"/>
           </a:xfrm>
@@ -4004,7 +4201,7 @@
                 <a:ea typeface="Arial" pitchFamily="34" charset="-122"/>
                 <a:cs typeface="Arial" pitchFamily="34" charset="-120"/>
               </a:rPr>
-              <a:t>3</a:t>
+              <a:t>4</a:t>
             </a:r>
             <a:endParaRPr lang="en-US" sz="1200" dirty="0"/>
           </a:p>
@@ -4012,13 +4209,13 @@
       </p:sp>
       <p:sp>
         <p:nvSpPr>
-          <p:cNvPr id="16" name="Text 14"/>
-          <p:cNvSpPr/>
-          <p:nvPr/>
-        </p:nvSpPr>
-        <p:spPr>
-          <a:xfrm>
-            <a:off x="4517136" y="3282696"/>
+          <p:cNvPr id="17" name="Text 15"/>
+          <p:cNvSpPr/>
+          <p:nvPr/>
+        </p:nvSpPr>
+        <p:spPr>
+          <a:xfrm>
+            <a:off x="5020056" y="2048256"/>
             <a:ext cx="384048" cy="384048"/>
           </a:xfrm>
           <a:prstGeom prst="ellipse">
@@ -4045,7 +4242,7 @@
                 <a:ea typeface="Arial" pitchFamily="34" charset="-122"/>
                 <a:cs typeface="Arial" pitchFamily="34" charset="-120"/>
               </a:rPr>
-              <a:t>4</a:t>
+              <a:t>5</a:t>
             </a:r>
             <a:endParaRPr lang="en-US" sz="1200" dirty="0"/>
           </a:p>
@@ -4053,13 +4250,13 @@
       </p:sp>
       <p:sp>
         <p:nvSpPr>
-          <p:cNvPr id="17" name="Text 15"/>
-          <p:cNvSpPr/>
-          <p:nvPr/>
-        </p:nvSpPr>
-        <p:spPr>
-          <a:xfrm>
-            <a:off x="2093976" y="3282696"/>
+          <p:cNvPr id="18" name="Text 16"/>
+          <p:cNvSpPr/>
+          <p:nvPr/>
+        </p:nvSpPr>
+        <p:spPr>
+          <a:xfrm>
+            <a:off x="4014216" y="3282696"/>
             <a:ext cx="384048" cy="384048"/>
           </a:xfrm>
           <a:prstGeom prst="ellipse">
@@ -4086,7 +4283,7 @@
                 <a:ea typeface="Arial" pitchFamily="34" charset="-122"/>
                 <a:cs typeface="Arial" pitchFamily="34" charset="-120"/>
               </a:rPr>
-              <a:t>5</a:t>
+              <a:t>6</a:t>
             </a:r>
             <a:endParaRPr lang="en-US" sz="1200" dirty="0"/>
           </a:p>
@@ -4094,7 +4291,7 @@
       </p:sp>
       <p:sp>
         <p:nvSpPr>
-          <p:cNvPr id="18" name="Text 16"/>
+          <p:cNvPr id="19" name="Text 17"/>
           <p:cNvSpPr/>
           <p:nvPr/>
         </p:nvSpPr>
@@ -4133,7 +4330,7 @@
       </p:sp>
       <p:sp>
         <p:nvSpPr>
-          <p:cNvPr id="19" name="Text 17"/>
+          <p:cNvPr id="20" name="Text 18"/>
           <p:cNvSpPr/>
           <p:nvPr/>
         </p:nvSpPr>
@@ -4187,7 +4384,7 @@
                 <a:ea typeface="Arial" pitchFamily="34" charset="-122"/>
                 <a:cs typeface="Arial" pitchFamily="34" charset="-120"/>
               </a:rPr>
-              <a:t>2. Geographic and channel expansion</a:t>
+              <a:t>2. Pricing harmonization</a:t>
             </a:r>
             <a:endParaRPr lang="en-US" sz="1100" dirty="0"/>
           </a:p>
@@ -4207,7 +4404,7 @@
                 <a:ea typeface="Arial" pitchFamily="34" charset="-122"/>
                 <a:cs typeface="Arial" pitchFamily="34" charset="-120"/>
               </a:rPr>
-              <a:t>3. Procurement scale and vendor consolidation</a:t>
+              <a:t>3. Key account retention program</a:t>
             </a:r>
             <a:endParaRPr lang="en-US" sz="1100" dirty="0"/>
           </a:p>
@@ -4227,7 +4424,7 @@
                 <a:ea typeface="Arial" pitchFamily="34" charset="-122"/>
                 <a:cs typeface="Arial" pitchFamily="34" charset="-120"/>
               </a:rPr>
-              <a:t>4. Overlapping G&amp;A rationalization</a:t>
+              <a:t>4. Procurement scale and vendor consolidation</a:t>
             </a:r>
             <a:endParaRPr lang="en-US" sz="1100" dirty="0"/>
           </a:p>
@@ -4247,15 +4444,35 @@
                 <a:ea typeface="Arial" pitchFamily="34" charset="-122"/>
                 <a:cs typeface="Arial" pitchFamily="34" charset="-120"/>
               </a:rPr>
-              <a:t>5. Facility and footprint optimization</a:t>
+              <a:t>5. Margin improvement to peer levels</a:t>
             </a:r>
             <a:endParaRPr lang="en-US" sz="1100" dirty="0"/>
           </a:p>
-        </p:txBody>
-      </p:sp>
-      <p:sp>
-        <p:nvSpPr>
-          <p:cNvPr id="20" name="Text 18"/>
+          <a:p>
+            <a:pPr indent="0" marL="0">
+              <a:lnSpc>
+                <a:spcPts val="2000"/>
+              </a:lnSpc>
+              <a:buNone/>
+            </a:pPr>
+            <a:r>
+              <a:rPr lang="en-US" sz="1100" dirty="0">
+                <a:solidFill>
+                  <a:srgbClr val="404850"/>
+                </a:solidFill>
+                <a:latin typeface="Arial" pitchFamily="34" charset="0"/>
+                <a:ea typeface="Arial" pitchFamily="34" charset="-122"/>
+                <a:cs typeface="Arial" pitchFamily="34" charset="-120"/>
+              </a:rPr>
+              <a:t>6. Overlapping G&amp;A rationalization</a:t>
+            </a:r>
+            <a:endParaRPr lang="en-US" sz="1100" dirty="0"/>
+          </a:p>
+        </p:txBody>
+      </p:sp>
+      <p:sp>
+        <p:nvSpPr>
+          <p:cNvPr id="21" name="Text 19"/>
           <p:cNvSpPr/>
           <p:nvPr/>
         </p:nvSpPr>

--- a/samples/financial_Presentation.pptx
+++ b/samples/financial_Presentation.pptx
@@ -1667,16 +1667,18 @@
         <p:spPr>
           <a:xfrm>
             <a:off x="411480" y="457200"/>
-            <a:ext cx="11365992" cy="777240"/>
-          </a:xfrm>
-          <a:prstGeom prst="rect">
-            <a:avLst/>
-          </a:prstGeom>
-          <a:noFill/>
-          <a:ln/>
-        </p:spPr>
-        <p:txBody>
-          <a:bodyPr wrap="square" rtlCol="0" anchor="t"/>
+            <a:ext cx="11365992" cy="822960"/>
+          </a:xfrm>
+          <a:prstGeom prst="rect">
+            <a:avLst/>
+          </a:prstGeom>
+          <a:noFill/>
+          <a:ln/>
+        </p:spPr>
+        <p:txBody>
+          <a:bodyPr wrap="square" rtlCol="0" anchor="t">
+            <a:normAutofit/>
+          </a:bodyPr>
           <a:lstStyle/>
           <a:p>
             <a:pPr indent="0" marL="0">
@@ -1755,7 +1757,9 @@
           <a:ln/>
         </p:spPr>
         <p:txBody>
-          <a:bodyPr wrap="square" rtlCol="0" anchor="ctr"/>
+          <a:bodyPr wrap="square" rtlCol="0" anchor="ctr">
+            <a:normAutofit/>
+          </a:bodyPr>
           <a:lstStyle/>
           <a:p>
             <a:pPr indent="0" marL="0">
@@ -1823,17 +1827,19 @@
         </p:nvSpPr>
         <p:spPr>
           <a:xfrm>
-            <a:off x="411480" y="1325880"/>
-            <a:ext cx="11365992" cy="594360"/>
-          </a:xfrm>
-          <a:prstGeom prst="rect">
-            <a:avLst/>
-          </a:prstGeom>
-          <a:noFill/>
-          <a:ln/>
-        </p:spPr>
-        <p:txBody>
-          <a:bodyPr wrap="square" rtlCol="0" anchor="t"/>
+            <a:off x="411480" y="1371600"/>
+            <a:ext cx="11365992" cy="566928"/>
+          </a:xfrm>
+          <a:prstGeom prst="rect">
+            <a:avLst/>
+          </a:prstGeom>
+          <a:noFill/>
+          <a:ln/>
+        </p:spPr>
+        <p:txBody>
+          <a:bodyPr wrap="square" rtlCol="0" anchor="t">
+            <a:normAutofit/>
+          </a:bodyPr>
           <a:lstStyle/>
           <a:p>
             <a:pPr indent="0" marL="0">
@@ -1848,7 +1854,7 @@
                 <a:ea typeface="Arial" pitchFamily="34" charset="-122"/>
                 <a:cs typeface="Arial" pitchFamily="34" charset="-120"/>
               </a:rPr>
-              <a:t>The client is evaluating the acquisition of Meridian Components Inc. to expand into the Midwest market with meaningful procurement synergies.</a:t>
+              <a:t>The client is evaluating the acquisition of Meridian Components Inc., with a focus on expand into the Midwest market with meaningful procurement synergies.</a:t>
             </a:r>
             <a:endParaRPr lang="en-US" sz="1250" dirty="0"/>
           </a:p>
@@ -1911,7 +1917,9 @@
           <a:ln/>
         </p:spPr>
         <p:txBody>
-          <a:bodyPr wrap="square" rtlCol="0" anchor="t"/>
+          <a:bodyPr wrap="square" rtlCol="0" anchor="t">
+            <a:normAutofit/>
+          </a:bodyPr>
           <a:lstStyle/>
           <a:p>
             <a:pPr indent="0" marL="0">
@@ -2071,7 +2079,9 @@
           <a:ln/>
         </p:spPr>
         <p:txBody>
-          <a:bodyPr wrap="square" rtlCol="0" anchor="t"/>
+          <a:bodyPr wrap="square" rtlCol="0" anchor="t">
+            <a:normAutofit/>
+          </a:bodyPr>
           <a:lstStyle/>
           <a:p>
             <a:pPr indent="0" marL="0">
@@ -2334,16 +2344,18 @@
         <p:spPr>
           <a:xfrm>
             <a:off x="411480" y="457200"/>
-            <a:ext cx="11365992" cy="777240"/>
-          </a:xfrm>
-          <a:prstGeom prst="rect">
-            <a:avLst/>
-          </a:prstGeom>
-          <a:noFill/>
-          <a:ln/>
-        </p:spPr>
-        <p:txBody>
-          <a:bodyPr wrap="square" rtlCol="0" anchor="t"/>
+            <a:ext cx="11365992" cy="822960"/>
+          </a:xfrm>
+          <a:prstGeom prst="rect">
+            <a:avLst/>
+          </a:prstGeom>
+          <a:noFill/>
+          <a:ln/>
+        </p:spPr>
+        <p:txBody>
+          <a:bodyPr wrap="square" rtlCol="0" anchor="t">
+            <a:normAutofit/>
+          </a:bodyPr>
           <a:lstStyle/>
           <a:p>
             <a:pPr indent="0" marL="0">
@@ -2422,7 +2434,9 @@
           <a:ln/>
         </p:spPr>
         <p:txBody>
-          <a:bodyPr wrap="square" rtlCol="0" anchor="ctr"/>
+          <a:bodyPr wrap="square" rtlCol="0" anchor="ctr">
+            <a:normAutofit/>
+          </a:bodyPr>
           <a:lstStyle/>
           <a:p>
             <a:pPr indent="0" marL="0">
@@ -2541,7 +2555,9 @@
           <a:ln/>
         </p:spPr>
         <p:txBody>
-          <a:bodyPr wrap="square" rtlCol="0" anchor="ctr"/>
+          <a:bodyPr wrap="square" rtlCol="0" anchor="ctr">
+            <a:normAutofit/>
+          </a:bodyPr>
           <a:lstStyle/>
           <a:p>
             <a:pPr indent="0" marL="0">
@@ -2594,7 +2610,9 @@
           <a:ln/>
         </p:spPr>
         <p:txBody>
-          <a:bodyPr wrap="square" rtlCol="0" anchor="t"/>
+          <a:bodyPr wrap="square" rtlCol="0" anchor="t">
+            <a:normAutofit/>
+          </a:bodyPr>
           <a:lstStyle/>
           <a:p>
             <a:pPr indent="0" marL="0">
@@ -2677,7 +2695,9 @@
           <a:ln/>
         </p:spPr>
         <p:txBody>
-          <a:bodyPr wrap="square" rtlCol="0" anchor="ctr"/>
+          <a:bodyPr wrap="square" rtlCol="0" anchor="ctr">
+            <a:normAutofit/>
+          </a:bodyPr>
           <a:lstStyle/>
           <a:p>
             <a:pPr indent="0" marL="0">
@@ -2730,7 +2750,9 @@
           <a:ln/>
         </p:spPr>
         <p:txBody>
-          <a:bodyPr wrap="square" rtlCol="0" anchor="t"/>
+          <a:bodyPr wrap="square" rtlCol="0" anchor="t">
+            <a:normAutofit/>
+          </a:bodyPr>
           <a:lstStyle/>
           <a:p>
             <a:pPr indent="0" marL="0">
@@ -2813,7 +2835,9 @@
           <a:ln/>
         </p:spPr>
         <p:txBody>
-          <a:bodyPr wrap="square" rtlCol="0" anchor="ctr"/>
+          <a:bodyPr wrap="square" rtlCol="0" anchor="ctr">
+            <a:normAutofit/>
+          </a:bodyPr>
           <a:lstStyle/>
           <a:p>
             <a:pPr indent="0" marL="0">
@@ -2866,7 +2890,9 @@
           <a:ln/>
         </p:spPr>
         <p:txBody>
-          <a:bodyPr wrap="square" rtlCol="0" anchor="t"/>
+          <a:bodyPr wrap="square" rtlCol="0" anchor="t">
+            <a:normAutofit/>
+          </a:bodyPr>
           <a:lstStyle/>
           <a:p>
             <a:pPr indent="0" marL="0">
@@ -3050,16 +3076,18 @@
         <p:spPr>
           <a:xfrm>
             <a:off x="411480" y="457200"/>
-            <a:ext cx="11365992" cy="777240"/>
-          </a:xfrm>
-          <a:prstGeom prst="rect">
-            <a:avLst/>
-          </a:prstGeom>
-          <a:noFill/>
-          <a:ln/>
-        </p:spPr>
-        <p:txBody>
-          <a:bodyPr wrap="square" rtlCol="0" anchor="t"/>
+            <a:ext cx="11365992" cy="822960"/>
+          </a:xfrm>
+          <a:prstGeom prst="rect">
+            <a:avLst/>
+          </a:prstGeom>
+          <a:noFill/>
+          <a:ln/>
+        </p:spPr>
+        <p:txBody>
+          <a:bodyPr wrap="square" rtlCol="0" anchor="t">
+            <a:normAutofit/>
+          </a:bodyPr>
           <a:lstStyle/>
           <a:p>
             <a:pPr indent="0" marL="0">
@@ -3138,7 +3166,9 @@
           <a:ln/>
         </p:spPr>
         <p:txBody>
-          <a:bodyPr wrap="square" rtlCol="0" anchor="ctr"/>
+          <a:bodyPr wrap="square" rtlCol="0" anchor="ctr">
+            <a:normAutofit/>
+          </a:bodyPr>
           <a:lstStyle/>
           <a:p>
             <a:pPr indent="0" marL="0">
@@ -3257,7 +3287,9 @@
           <a:ln/>
         </p:spPr>
         <p:txBody>
-          <a:bodyPr wrap="square" rtlCol="0" anchor="ctr"/>
+          <a:bodyPr wrap="square" rtlCol="0" anchor="ctr">
+            <a:normAutofit/>
+          </a:bodyPr>
           <a:lstStyle/>
           <a:p>
             <a:pPr indent="0" marL="0">
@@ -3310,7 +3342,9 @@
           <a:ln/>
         </p:spPr>
         <p:txBody>
-          <a:bodyPr wrap="square" rtlCol="0" anchor="t"/>
+          <a:bodyPr wrap="square" rtlCol="0" anchor="t">
+            <a:normAutofit/>
+          </a:bodyPr>
           <a:lstStyle/>
           <a:p>
             <a:pPr indent="0" marL="0">
@@ -3393,7 +3427,9 @@
           <a:ln/>
         </p:spPr>
         <p:txBody>
-          <a:bodyPr wrap="square" rtlCol="0" anchor="ctr"/>
+          <a:bodyPr wrap="square" rtlCol="0" anchor="ctr">
+            <a:normAutofit/>
+          </a:bodyPr>
           <a:lstStyle/>
           <a:p>
             <a:pPr indent="0" marL="0">
@@ -3446,7 +3482,9 @@
           <a:ln/>
         </p:spPr>
         <p:txBody>
-          <a:bodyPr wrap="square" rtlCol="0" anchor="t"/>
+          <a:bodyPr wrap="square" rtlCol="0" anchor="t">
+            <a:normAutofit/>
+          </a:bodyPr>
           <a:lstStyle/>
           <a:p>
             <a:pPr indent="0" marL="0">
@@ -3529,7 +3567,9 @@
           <a:ln/>
         </p:spPr>
         <p:txBody>
-          <a:bodyPr wrap="square" rtlCol="0" anchor="ctr"/>
+          <a:bodyPr wrap="square" rtlCol="0" anchor="ctr">
+            <a:normAutofit/>
+          </a:bodyPr>
           <a:lstStyle/>
           <a:p>
             <a:pPr indent="0" marL="0">
@@ -3582,7 +3622,9 @@
           <a:ln/>
         </p:spPr>
         <p:txBody>
-          <a:bodyPr wrap="square" rtlCol="0" anchor="t"/>
+          <a:bodyPr wrap="square" rtlCol="0" anchor="t">
+            <a:normAutofit/>
+          </a:bodyPr>
           <a:lstStyle/>
           <a:p>
             <a:pPr indent="0" marL="0">
@@ -3766,16 +3808,18 @@
         <p:spPr>
           <a:xfrm>
             <a:off x="411480" y="457200"/>
-            <a:ext cx="11365992" cy="777240"/>
-          </a:xfrm>
-          <a:prstGeom prst="rect">
-            <a:avLst/>
-          </a:prstGeom>
-          <a:noFill/>
-          <a:ln/>
-        </p:spPr>
-        <p:txBody>
-          <a:bodyPr wrap="square" rtlCol="0" anchor="t"/>
+            <a:ext cx="11365992" cy="822960"/>
+          </a:xfrm>
+          <a:prstGeom prst="rect">
+            <a:avLst/>
+          </a:prstGeom>
+          <a:noFill/>
+          <a:ln/>
+        </p:spPr>
+        <p:txBody>
+          <a:bodyPr wrap="square" rtlCol="0" anchor="t">
+            <a:normAutofit/>
+          </a:bodyPr>
           <a:lstStyle/>
           <a:p>
             <a:pPr indent="0" marL="0">
@@ -4346,7 +4390,9 @@
           <a:ln/>
         </p:spPr>
         <p:txBody>
-          <a:bodyPr wrap="square" rtlCol="0" anchor="t"/>
+          <a:bodyPr wrap="square" rtlCol="0" anchor="t">
+            <a:normAutofit/>
+          </a:bodyPr>
           <a:lstStyle/>
           <a:p>
             <a:pPr indent="0" marL="0">

--- a/samples/financial_Presentation.pptx
+++ b/samples/financial_Presentation.pptx
@@ -109,6 +109,496 @@
     </a:lvl9pPr>
   </p:defaultTextStyle>
 </p:presentation>
+</file>
+
+<file path=ppt/charts/chart10.xml><?xml version="1.0" encoding="utf-8"?>
+<c:chartSpace xmlns:c="http://schemas.openxmlformats.org/drawingml/2006/chart" xmlns:a="http://schemas.openxmlformats.org/drawingml/2006/main" xmlns:r="http://schemas.openxmlformats.org/officeDocument/2006/relationships">
+  <c:date1904 val="0"/>
+  <c:roundedCorners val="1"/>
+  <c:chart>
+    <c:autoTitleDeleted val="1"/>
+    <c:plotArea>
+      <c:layout/>
+      <c:lineChart>
+        <c:varyColors val="0"/>
+        <c:ser>
+          <c:idx val="0"/>
+          <c:order val="0"/>
+          <c:tx>
+            <c:strRef>
+              <c:f>Sheet1!$B$1</c:f>
+              <c:strCache>
+                <c:ptCount val="1"/>
+                <c:pt idx="0">
+                  <c:v>EBITDA margin</c:v>
+                </c:pt>
+              </c:strCache>
+            </c:strRef>
+          </c:tx>
+          <c:spPr>
+            <a:solidFill>
+              <a:srgbClr val="00A0B0"/>
+            </a:solidFill>
+            <a:ln w="25400" cap="flat">
+              <a:solidFill>
+                <a:srgbClr val="00A0B0"/>
+              </a:solidFill>
+              <a:prstDash val="solid"/>
+              <a:round/>
+            </a:ln>
+            <a:effectLst/>
+          </c:spPr>
+          <c:invertIfNegative val="0"/>
+          <c:dLbls>
+            <c:numFmt formatCode="#,##0" sourceLinked="0"/>
+            <c:txPr>
+              <a:bodyPr/>
+              <a:lstStyle/>
+              <a:p>
+                <a:pPr>
+                  <a:defRPr b="0" i="0" strike="noStrike" sz="900" u="none">
+                    <a:solidFill>
+                      <a:srgbClr val="404850"/>
+                    </a:solidFill>
+                    <a:latin typeface="Arial"/>
+                  </a:defRPr>
+                </a:pPr>
+              </a:p>
+            </c:txPr>
+            <c:dLblPos val="t"/>
+            <c:showLegendKey val="0"/>
+            <c:showVal val="1"/>
+            <c:showCatName val="0"/>
+            <c:showSerName val="0"/>
+            <c:showPercent val="0"/>
+            <c:showBubbleSize val="0"/>
+            <c:showLeaderLines val="0"/>
+          </c:dLbls>
+          <c:marker>
+            <c:symbol val="circle"/>
+            <c:size val="6"/>
+            <c:spPr>
+              <a:solidFill>
+                <a:srgbClr val="00A0B0"/>
+              </a:solidFill>
+              <a:ln w="9525" cap="flat">
+                <a:solidFill>
+                  <a:srgbClr val="00A0B0"/>
+                </a:solidFill>
+                <a:prstDash val="solid"/>
+                <a:round/>
+              </a:ln>
+              <a:effectLst/>
+            </c:spPr>
+          </c:marker>
+          <c:cat>
+            <c:multiLvlStrRef>
+              <c:f>Sheet1!$A$2:$A$5</c:f>
+              <c:multiLvlStrCache>
+                <c:ptCount val="4"/>
+                <c:lvl>
+                  <c:pt idx="0">
+                    <c:v>FY21A</c:v>
+                  </c:pt>
+                  <c:pt idx="1">
+                    <c:v>FY22A</c:v>
+                  </c:pt>
+                  <c:pt idx="2">
+                    <c:v>FY23A</c:v>
+                  </c:pt>
+                  <c:pt idx="3">
+                    <c:v>FY24A</c:v>
+                  </c:pt>
+                </c:lvl>
+              </c:multiLvlStrCache>
+            </c:multiLvlStrRef>
+          </c:cat>
+          <c:val>
+            <c:numRef>
+              <c:f>Sheet1!$B$2:$B$5</c:f>
+              <c:numCache>
+                <c:formatCode>General</c:formatCode>
+                <c:ptCount val="4"/>
+                <c:pt idx="0">
+                  <c:v>15</c:v>
+                </c:pt>
+                <c:pt idx="1">
+                  <c:v>16.1</c:v>
+                </c:pt>
+                <c:pt idx="2">
+                  <c:v>17.3</c:v>
+                </c:pt>
+                <c:pt idx="3">
+                  <c:v>18.7</c:v>
+                </c:pt>
+              </c:numCache>
+            </c:numRef>
+          </c:val>
+          <c:smooth val="0"/>
+        </c:ser>
+        <c:dLbls>
+          <c:numFmt formatCode="#,##0" sourceLinked="0"/>
+          <c:txPr>
+            <a:bodyPr/>
+            <a:lstStyle/>
+            <a:p>
+              <a:pPr>
+                <a:defRPr b="0" i="0" strike="noStrike" sz="900" u="none">
+                  <a:solidFill>
+                    <a:srgbClr val="404850"/>
+                  </a:solidFill>
+                  <a:latin typeface="Arial"/>
+                </a:defRPr>
+              </a:pPr>
+            </a:p>
+          </c:txPr>
+          <c:dLblPos val="t"/>
+          <c:showLegendKey val="0"/>
+          <c:showVal val="1"/>
+          <c:showCatName val="0"/>
+          <c:showSerName val="0"/>
+          <c:showPercent val="0"/>
+          <c:showBubbleSize val="0"/>
+          <c:showLeaderLines val="0"/>
+        </c:dLbls>
+        <c:marker val="1"/>
+        <c:axId val="2094734554"/>
+        <c:axId val="2094734552"/>
+        <c:axId val="2094734556"/>
+      </c:lineChart>
+      <c:catAx>
+        <c:axId val="2094734554"/>
+        <c:scaling>
+          <c:orientation val="minMax"/>
+        </c:scaling>
+        <c:delete val="0"/>
+        <c:axPos val="b"/>
+        <c:numFmt formatCode="General" sourceLinked="1"/>
+        <c:majorTickMark val="out"/>
+        <c:minorTickMark val="none"/>
+        <c:tickLblPos val="low"/>
+        <c:spPr>
+          <a:ln w="12700" cap="flat">
+            <a:noFill/>
+            <a:prstDash val="solid"/>
+            <a:round/>
+          </a:ln>
+        </c:spPr>
+        <c:txPr>
+          <a:bodyPr/>
+          <a:lstStyle/>
+          <a:p>
+            <a:pPr>
+              <a:defRPr sz="1000" b="0" i="0" u="none" strike="noStrike">
+                <a:solidFill>
+                  <a:srgbClr val="63666A"/>
+                </a:solidFill>
+                <a:latin typeface="Arial"/>
+              </a:defRPr>
+            </a:pPr>
+            <a:endParaRPr lang="en-US"/>
+          </a:p>
+        </c:txPr>
+        <c:crossAx val="2094734552"/>
+        <c:crosses val="autoZero"/>
+        <c:auto val="1"/>
+        <c:lblAlgn val="ctr"/>
+        <c:noMultiLvlLbl val="1"/>
+      </c:catAx>
+      <c:valAx>
+        <c:axId val="2094734552"/>
+        <c:scaling>
+          <c:orientation val="minMax"/>
+        </c:scaling>
+        <c:delete val="1"/>
+        <c:axPos val="l"/>
+        <c:numFmt formatCode="General" sourceLinked="0"/>
+        <c:majorTickMark val="out"/>
+        <c:minorTickMark val="none"/>
+        <c:tickLblPos val="nextTo"/>
+        <c:spPr>
+          <a:ln w="12700" cap="flat">
+            <a:solidFill>
+              <a:srgbClr val="888888"/>
+            </a:solidFill>
+            <a:prstDash val="solid"/>
+            <a:round/>
+          </a:ln>
+        </c:spPr>
+        <c:txPr>
+          <a:bodyPr/>
+          <a:lstStyle/>
+          <a:p>
+            <a:pPr>
+              <a:defRPr sz="1200" b="0" i="0" u="none" strike="noStrike">
+                <a:solidFill>
+                  <a:srgbClr val="000000"/>
+                </a:solidFill>
+                <a:latin typeface="Arial"/>
+              </a:defRPr>
+            </a:pPr>
+            <a:endParaRPr lang="en-US"/>
+          </a:p>
+        </c:txPr>
+        <c:crossAx val="2094734554"/>
+        <c:crosses val="autoZero"/>
+        <c:crossBetween val="between"/>
+      </c:valAx>
+      <c:spPr>
+        <a:noFill/>
+        <a:ln>
+          <a:noFill/>
+        </a:ln>
+        <a:effectLst/>
+      </c:spPr>
+    </c:plotArea>
+    <c:plotVisOnly val="1"/>
+    <c:dispBlanksAs val="span"/>
+  </c:chart>
+  <c:spPr>
+    <a:noFill/>
+    <a:ln>
+      <a:noFill/>
+    </a:ln>
+    <a:effectLst/>
+  </c:spPr>
+  <c:externalData r:id="rId1">
+    <c:autoUpdate val="0"/>
+  </c:externalData>
+</c:chartSpace>
+</file>
+
+<file path=ppt/charts/chart9.xml><?xml version="1.0" encoding="utf-8"?>
+<c:chartSpace xmlns:c="http://schemas.openxmlformats.org/drawingml/2006/chart" xmlns:a="http://schemas.openxmlformats.org/drawingml/2006/main" xmlns:r="http://schemas.openxmlformats.org/officeDocument/2006/relationships">
+  <c:date1904 val="0"/>
+  <c:roundedCorners val="1"/>
+  <c:chart>
+    <c:autoTitleDeleted val="1"/>
+    <c:plotArea>
+      <c:layout/>
+      <c:barChart>
+        <c:barDir val="col"/>
+        <c:grouping val="clustered"/>
+        <c:varyColors val="0"/>
+        <c:ser>
+          <c:idx val="0"/>
+          <c:order val="0"/>
+          <c:tx>
+            <c:strRef>
+              <c:f>Sheet1!$B$1</c:f>
+              <c:strCache>
+                <c:ptCount val="1"/>
+                <c:pt idx="0">
+                  <c:v>Revenue</c:v>
+                </c:pt>
+              </c:strCache>
+            </c:strRef>
+          </c:tx>
+          <c:spPr>
+            <a:solidFill>
+              <a:srgbClr val="1F4CFF"/>
+            </a:solidFill>
+            <a:effectLst/>
+          </c:spPr>
+          <c:invertIfNegative val="0"/>
+          <c:dLbls>
+            <c:numFmt formatCode="#,##0" sourceLinked="0"/>
+            <c:txPr>
+              <a:bodyPr/>
+              <a:lstStyle/>
+              <a:p>
+                <a:pPr>
+                  <a:defRPr b="0" i="0" strike="noStrike" sz="900" u="none">
+                    <a:solidFill>
+                      <a:srgbClr val="404850"/>
+                    </a:solidFill>
+                    <a:latin typeface="Arial"/>
+                  </a:defRPr>
+                </a:pPr>
+              </a:p>
+            </c:txPr>
+            <c:showLegendKey val="0"/>
+            <c:showVal val="1"/>
+            <c:showCatName val="0"/>
+            <c:showSerName val="0"/>
+            <c:showPercent val="0"/>
+            <c:showBubbleSize val="0"/>
+            <c:showLeaderLines val="0"/>
+          </c:dLbls>
+          <c:cat>
+            <c:multiLvlStrRef>
+              <c:f>Sheet1!$A$2:$A$5</c:f>
+              <c:multiLvlStrCache>
+                <c:ptCount val="4"/>
+                <c:lvl>
+                  <c:pt idx="0">
+                    <c:v>FY21A</c:v>
+                  </c:pt>
+                  <c:pt idx="1">
+                    <c:v>FY22A</c:v>
+                  </c:pt>
+                  <c:pt idx="2">
+                    <c:v>FY23A</c:v>
+                  </c:pt>
+                  <c:pt idx="3">
+                    <c:v>FY24A</c:v>
+                  </c:pt>
+                </c:lvl>
+              </c:multiLvlStrCache>
+            </c:multiLvlStrRef>
+          </c:cat>
+          <c:val>
+            <c:numRef>
+              <c:f>Sheet1!$B$2:$B$5</c:f>
+              <c:numCache>
+                <c:formatCode>General</c:formatCode>
+                <c:ptCount val="4"/>
+                <c:pt idx="0">
+                  <c:v>142</c:v>
+                </c:pt>
+                <c:pt idx="1">
+                  <c:v>154</c:v>
+                </c:pt>
+                <c:pt idx="2">
+                  <c:v>168</c:v>
+                </c:pt>
+                <c:pt idx="3">
+                  <c:v>183</c:v>
+                </c:pt>
+              </c:numCache>
+            </c:numRef>
+          </c:val>
+        </c:ser>
+        <c:dLbls>
+          <c:numFmt formatCode="#,##0" sourceLinked="0"/>
+          <c:txPr>
+            <a:bodyPr/>
+            <a:lstStyle/>
+            <a:p>
+              <a:pPr>
+                <a:defRPr b="0" i="0" strike="noStrike" sz="900" u="none">
+                  <a:solidFill>
+                    <a:srgbClr val="404850"/>
+                  </a:solidFill>
+                  <a:latin typeface="Arial"/>
+                </a:defRPr>
+              </a:pPr>
+            </a:p>
+          </c:txPr>
+          <c:showLegendKey val="0"/>
+          <c:showVal val="1"/>
+          <c:showCatName val="0"/>
+          <c:showSerName val="0"/>
+          <c:showPercent val="0"/>
+          <c:showBubbleSize val="0"/>
+          <c:showLeaderLines val="0"/>
+        </c:dLbls>
+        <c:gapWidth val="40"/>
+        <c:overlap val="0"/>
+        <c:axId val="2094734554"/>
+        <c:axId val="2094734552"/>
+        <c:axId val="2094734556"/>
+      </c:barChart>
+      <c:catAx>
+        <c:axId val="2094734554"/>
+        <c:scaling>
+          <c:orientation val="minMax"/>
+        </c:scaling>
+        <c:delete val="0"/>
+        <c:axPos val="b"/>
+        <c:numFmt formatCode="General" sourceLinked="1"/>
+        <c:majorTickMark val="out"/>
+        <c:minorTickMark val="none"/>
+        <c:tickLblPos val="low"/>
+        <c:spPr>
+          <a:ln w="12700" cap="flat">
+            <a:noFill/>
+            <a:prstDash val="solid"/>
+            <a:round/>
+          </a:ln>
+        </c:spPr>
+        <c:txPr>
+          <a:bodyPr/>
+          <a:lstStyle/>
+          <a:p>
+            <a:pPr>
+              <a:defRPr sz="1000" b="0" i="0" u="none" strike="noStrike">
+                <a:solidFill>
+                  <a:srgbClr val="63666A"/>
+                </a:solidFill>
+                <a:latin typeface="Arial"/>
+              </a:defRPr>
+            </a:pPr>
+            <a:endParaRPr lang="en-US"/>
+          </a:p>
+        </c:txPr>
+        <c:crossAx val="2094734552"/>
+        <c:crosses val="autoZero"/>
+        <c:auto val="1"/>
+        <c:lblAlgn val="ctr"/>
+        <c:noMultiLvlLbl val="1"/>
+      </c:catAx>
+      <c:valAx>
+        <c:axId val="2094734552"/>
+        <c:scaling>
+          <c:orientation val="minMax"/>
+        </c:scaling>
+        <c:delete val="1"/>
+        <c:axPos val="l"/>
+        <c:numFmt formatCode="General" sourceLinked="0"/>
+        <c:majorTickMark val="out"/>
+        <c:minorTickMark val="none"/>
+        <c:tickLblPos val="nextTo"/>
+        <c:spPr>
+          <a:ln w="12700" cap="flat">
+            <a:solidFill>
+              <a:srgbClr val="888888"/>
+            </a:solidFill>
+            <a:prstDash val="solid"/>
+            <a:round/>
+          </a:ln>
+        </c:spPr>
+        <c:txPr>
+          <a:bodyPr/>
+          <a:lstStyle/>
+          <a:p>
+            <a:pPr>
+              <a:defRPr sz="1200" b="0" i="0" u="none" strike="noStrike">
+                <a:solidFill>
+                  <a:srgbClr val="000000"/>
+                </a:solidFill>
+                <a:latin typeface="Arial"/>
+              </a:defRPr>
+            </a:pPr>
+            <a:endParaRPr lang="en-US"/>
+          </a:p>
+        </c:txPr>
+        <c:crossAx val="2094734554"/>
+        <c:crosses val="autoZero"/>
+        <c:crossBetween val="between"/>
+      </c:valAx>
+      <c:spPr>
+        <a:noFill/>
+        <a:ln>
+          <a:noFill/>
+        </a:ln>
+        <a:effectLst/>
+      </c:spPr>
+    </c:plotArea>
+    <c:plotVisOnly val="1"/>
+    <c:dispBlanksAs val="span"/>
+  </c:chart>
+  <c:spPr>
+    <a:noFill/>
+    <a:ln>
+      <a:noFill/>
+    </a:ln>
+    <a:effectLst/>
+  </c:spPr>
+  <c:externalData r:id="rId1">
+    <c:autoUpdate val="0"/>
+  </c:externalData>
+</c:chartSpace>
 </file>
 
 <file path=ppt/notesMasters/notesMaster1.xml><?xml version="1.0" encoding="utf-8"?>
@@ -1827,8 +2317,8 @@
         </p:nvSpPr>
         <p:spPr>
           <a:xfrm>
-            <a:off x="411480" y="1371600"/>
-            <a:ext cx="11365992" cy="566928"/>
+            <a:off x="411480" y="1298448"/>
+            <a:ext cx="5623560" cy="868680"/>
           </a:xfrm>
           <a:prstGeom prst="rect">
             <a:avLst/>
@@ -1846,7 +2336,7 @@
               <a:buNone/>
             </a:pPr>
             <a:r>
-              <a:rPr lang="en-US" sz="1250" dirty="0">
+              <a:rPr lang="en-US" sz="1200" dirty="0">
                 <a:solidFill>
                   <a:srgbClr val="404850"/>
                 </a:solidFill>
@@ -1856,7 +2346,7 @@
               </a:rPr>
               <a:t>The client is evaluating the acquisition of Meridian Components Inc., with a focus on expand into the Midwest market with meaningful procurement synergies.</a:t>
             </a:r>
-            <a:endParaRPr lang="en-US" sz="1250" dirty="0"/>
+            <a:endParaRPr lang="en-US" sz="1200" dirty="0"/>
           </a:p>
         </p:txBody>
       </p:sp>
@@ -1868,8 +2358,8 @@
         </p:nvSpPr>
         <p:spPr>
           <a:xfrm>
-            <a:off x="411480" y="2057400"/>
-            <a:ext cx="5577840" cy="320040"/>
+            <a:off x="411480" y="2286000"/>
+            <a:ext cx="5623560" cy="274320"/>
           </a:xfrm>
           <a:prstGeom prst="rect">
             <a:avLst/>
@@ -1885,7 +2375,7 @@
               <a:buNone/>
             </a:pPr>
             <a:r>
-              <a:rPr lang="en-US" sz="1200" b="1" spc="100" kern="0" dirty="0">
+              <a:rPr lang="en-US" sz="1100" b="1" spc="100" kern="0" dirty="0">
                 <a:solidFill>
                   <a:srgbClr val="1F4CFF"/>
                 </a:solidFill>
@@ -1893,9 +2383,9 @@
                 <a:ea typeface="Arial" pitchFamily="34" charset="-122"/>
                 <a:cs typeface="Arial" pitchFamily="34" charset="-120"/>
               </a:rPr>
-              <a:t>1. REVENUE SYNERGIES</a:t>
-            </a:r>
-            <a:endParaRPr lang="en-US" sz="1200" dirty="0"/>
+              <a:t>1. REVENUE SYNERGIES (SLIDE 2)</a:t>
+            </a:r>
+            <a:endParaRPr lang="en-US" sz="1100" dirty="0"/>
           </a:p>
         </p:txBody>
       </p:sp>
@@ -1907,8 +2397,8 @@
         </p:nvSpPr>
         <p:spPr>
           <a:xfrm>
-            <a:off x="411480" y="2423160"/>
-            <a:ext cx="5577840" cy="2194560"/>
+            <a:off x="411480" y="2578608"/>
+            <a:ext cx="5623560" cy="1325880"/>
           </a:xfrm>
           <a:prstGeom prst="rect">
             <a:avLst/>
@@ -1924,12 +2414,12 @@
           <a:p>
             <a:pPr indent="0" marL="0">
               <a:lnSpc>
-                <a:spcPts val="2600"/>
+                <a:spcPts val="2100"/>
               </a:lnSpc>
               <a:buNone/>
             </a:pPr>
             <a:r>
-              <a:rPr lang="en-US" sz="1300" dirty="0">
+              <a:rPr lang="en-US" sz="1200" dirty="0">
                 <a:solidFill>
                   <a:srgbClr val="0A1F2E"/>
                 </a:solidFill>
@@ -1939,17 +2429,17 @@
               </a:rPr>
               <a:t>1. Cross sell into the combined customer base</a:t>
             </a:r>
-            <a:endParaRPr lang="en-US" sz="1300" dirty="0"/>
+            <a:endParaRPr lang="en-US" sz="1200" dirty="0"/>
           </a:p>
           <a:p>
             <a:pPr indent="0" marL="0">
               <a:lnSpc>
-                <a:spcPts val="2600"/>
+                <a:spcPts val="2100"/>
               </a:lnSpc>
               <a:buNone/>
             </a:pPr>
             <a:r>
-              <a:rPr lang="en-US" sz="1300" dirty="0">
+              <a:rPr lang="en-US" sz="1200" dirty="0">
                 <a:solidFill>
                   <a:srgbClr val="0A1F2E"/>
                 </a:solidFill>
@@ -1959,17 +2449,17 @@
               </a:rPr>
               <a:t>2. Pricing harmonization</a:t>
             </a:r>
-            <a:endParaRPr lang="en-US" sz="1300" dirty="0"/>
+            <a:endParaRPr lang="en-US" sz="1200" dirty="0"/>
           </a:p>
           <a:p>
             <a:pPr indent="0" marL="0">
               <a:lnSpc>
-                <a:spcPts val="2600"/>
+                <a:spcPts val="2100"/>
               </a:lnSpc>
               <a:buNone/>
             </a:pPr>
             <a:r>
-              <a:rPr lang="en-US" sz="1300" dirty="0">
+              <a:rPr lang="en-US" sz="1200" dirty="0">
                 <a:solidFill>
                   <a:srgbClr val="0A1F2E"/>
                 </a:solidFill>
@@ -1979,7 +2469,7 @@
               </a:rPr>
               <a:t>3. Key account retention program</a:t>
             </a:r>
-            <a:endParaRPr lang="en-US" sz="1300" dirty="0"/>
+            <a:endParaRPr lang="en-US" sz="1200" dirty="0"/>
           </a:p>
         </p:txBody>
       </p:sp>
@@ -1991,8 +2481,8 @@
         </p:nvSpPr>
         <p:spPr>
           <a:xfrm>
-            <a:off x="411480" y="4892040"/>
-            <a:ext cx="5577840" cy="274320"/>
+            <a:off x="411480" y="4023360"/>
+            <a:ext cx="5623560" cy="274320"/>
           </a:xfrm>
           <a:prstGeom prst="rect">
             <a:avLst/>
@@ -2008,17 +2498,17 @@
               <a:buNone/>
             </a:pPr>
             <a:r>
-              <a:rPr lang="en-US" sz="1000" i="1" dirty="0">
-                <a:solidFill>
-                  <a:srgbClr val="63666A"/>
-                </a:solidFill>
-                <a:latin typeface="Arial" pitchFamily="34" charset="0"/>
-                <a:ea typeface="Arial" pitchFamily="34" charset="-122"/>
-                <a:cs typeface="Arial" pitchFamily="34" charset="-120"/>
-              </a:rPr>
-              <a:t>Expanded on slide 2</a:t>
-            </a:r>
-            <a:endParaRPr lang="en-US" sz="1000" dirty="0"/>
+              <a:rPr lang="en-US" sz="1100" b="1" spc="100" kern="0" dirty="0">
+                <a:solidFill>
+                  <a:srgbClr val="1F4CFF"/>
+                </a:solidFill>
+                <a:latin typeface="Arial" pitchFamily="34" charset="0"/>
+                <a:ea typeface="Arial" pitchFamily="34" charset="-122"/>
+                <a:cs typeface="Arial" pitchFamily="34" charset="-120"/>
+              </a:rPr>
+              <a:t>2. COST SYNERGIES (SLIDE 3)</a:t>
+            </a:r>
+            <a:endParaRPr lang="en-US" sz="1100" dirty="0"/>
           </a:p>
         </p:txBody>
       </p:sp>
@@ -2030,47 +2520,8 @@
         </p:nvSpPr>
         <p:spPr>
           <a:xfrm>
-            <a:off x="6172200" y="2057400"/>
-            <a:ext cx="5577840" cy="320040"/>
-          </a:xfrm>
-          <a:prstGeom prst="rect">
-            <a:avLst/>
-          </a:prstGeom>
-          <a:noFill/>
-          <a:ln/>
-        </p:spPr>
-        <p:txBody>
-          <a:bodyPr wrap="square" rtlCol="0" anchor="ctr"/>
-          <a:lstStyle/>
-          <a:p>
-            <a:pPr indent="0" marL="0">
-              <a:buNone/>
-            </a:pPr>
-            <a:r>
-              <a:rPr lang="en-US" sz="1200" b="1" spc="100" kern="0" dirty="0">
-                <a:solidFill>
-                  <a:srgbClr val="1F4CFF"/>
-                </a:solidFill>
-                <a:latin typeface="Arial" pitchFamily="34" charset="0"/>
-                <a:ea typeface="Arial" pitchFamily="34" charset="-122"/>
-                <a:cs typeface="Arial" pitchFamily="34" charset="-120"/>
-              </a:rPr>
-              <a:t>2. COST SYNERGIES</a:t>
-            </a:r>
-            <a:endParaRPr lang="en-US" sz="1200" dirty="0"/>
-          </a:p>
-        </p:txBody>
-      </p:sp>
-      <p:sp>
-        <p:nvSpPr>
-          <p:cNvPr id="14" name="Text 12"/>
-          <p:cNvSpPr/>
-          <p:nvPr/>
-        </p:nvSpPr>
-        <p:spPr>
-          <a:xfrm>
-            <a:off x="6172200" y="2423160"/>
-            <a:ext cx="5577840" cy="2194560"/>
+            <a:off x="411480" y="4315968"/>
+            <a:ext cx="5623560" cy="1325880"/>
           </a:xfrm>
           <a:prstGeom prst="rect">
             <a:avLst/>
@@ -2086,12 +2537,12 @@
           <a:p>
             <a:pPr indent="0" marL="0">
               <a:lnSpc>
-                <a:spcPts val="2600"/>
+                <a:spcPts val="2100"/>
               </a:lnSpc>
               <a:buNone/>
             </a:pPr>
             <a:r>
-              <a:rPr lang="en-US" sz="1300" dirty="0">
+              <a:rPr lang="en-US" sz="1200" dirty="0">
                 <a:solidFill>
                   <a:srgbClr val="0A1F2E"/>
                 </a:solidFill>
@@ -2101,17 +2552,17 @@
               </a:rPr>
               <a:t>4. Procurement scale and vendor consolidation</a:t>
             </a:r>
-            <a:endParaRPr lang="en-US" sz="1300" dirty="0"/>
+            <a:endParaRPr lang="en-US" sz="1200" dirty="0"/>
           </a:p>
           <a:p>
             <a:pPr indent="0" marL="0">
               <a:lnSpc>
-                <a:spcPts val="2600"/>
+                <a:spcPts val="2100"/>
               </a:lnSpc>
               <a:buNone/>
             </a:pPr>
             <a:r>
-              <a:rPr lang="en-US" sz="1300" dirty="0">
+              <a:rPr lang="en-US" sz="1200" dirty="0">
                 <a:solidFill>
                   <a:srgbClr val="0A1F2E"/>
                 </a:solidFill>
@@ -2121,17 +2572,17 @@
               </a:rPr>
               <a:t>5. Margin improvement to peer levels</a:t>
             </a:r>
-            <a:endParaRPr lang="en-US" sz="1300" dirty="0"/>
+            <a:endParaRPr lang="en-US" sz="1200" dirty="0"/>
           </a:p>
           <a:p>
             <a:pPr indent="0" marL="0">
               <a:lnSpc>
-                <a:spcPts val="2600"/>
+                <a:spcPts val="2100"/>
               </a:lnSpc>
               <a:buNone/>
             </a:pPr>
             <a:r>
-              <a:rPr lang="en-US" sz="1300" dirty="0">
+              <a:rPr lang="en-US" sz="1200" dirty="0">
                 <a:solidFill>
                   <a:srgbClr val="0A1F2E"/>
                 </a:solidFill>
@@ -2141,20 +2592,20 @@
               </a:rPr>
               <a:t>6. Overlapping G&amp;A rationalization</a:t>
             </a:r>
-            <a:endParaRPr lang="en-US" sz="1300" dirty="0"/>
-          </a:p>
-        </p:txBody>
-      </p:sp>
-      <p:sp>
-        <p:nvSpPr>
-          <p:cNvPr id="15" name="Text 13"/>
-          <p:cNvSpPr/>
-          <p:nvPr/>
-        </p:nvSpPr>
-        <p:spPr>
-          <a:xfrm>
-            <a:off x="6172200" y="4892040"/>
-            <a:ext cx="5577840" cy="274320"/>
+            <a:endParaRPr lang="en-US" sz="1200" dirty="0"/>
+          </a:p>
+        </p:txBody>
+      </p:sp>
+      <p:sp>
+        <p:nvSpPr>
+          <p:cNvPr id="14" name="Text 12"/>
+          <p:cNvSpPr/>
+          <p:nvPr/>
+        </p:nvSpPr>
+        <p:spPr>
+          <a:xfrm>
+            <a:off x="6263640" y="1298448"/>
+            <a:ext cx="5513832" cy="237744"/>
           </a:xfrm>
           <a:prstGeom prst="rect">
             <a:avLst/>
@@ -2170,7 +2621,7 @@
               <a:buNone/>
             </a:pPr>
             <a:r>
-              <a:rPr lang="en-US" sz="1000" i="1" dirty="0">
+              <a:rPr lang="en-US" sz="1000" b="1" spc="100" kern="0" dirty="0">
                 <a:solidFill>
                   <a:srgbClr val="63666A"/>
                 </a:solidFill>
@@ -2178,12 +2629,83 @@
                 <a:ea typeface="Arial" pitchFamily="34" charset="-122"/>
                 <a:cs typeface="Arial" pitchFamily="34" charset="-120"/>
               </a:rPr>
-              <a:t>Expanded on slide 3</a:t>
+              <a:t>REVENUE, $M</a:t>
             </a:r>
             <a:endParaRPr lang="en-US" sz="1000" dirty="0"/>
           </a:p>
         </p:txBody>
       </p:sp>
+      <p:graphicFrame>
+        <p:nvGraphicFramePr>
+          <p:cNvPr id="15" name="Chart 0" descr=""/>
+          <p:cNvGraphicFramePr/>
+          <p:nvPr/>
+        </p:nvGraphicFramePr>
+        <p:xfrm>
+          <a:off x="6263640" y="1554480"/>
+          <a:ext cx="5513832" cy="1965960"/>
+        </p:xfrm>
+        <a:graphic xmlns:a="http://schemas.openxmlformats.org/drawingml/2006/main">
+          <a:graphicData uri="http://schemas.openxmlformats.org/drawingml/2006/chart">
+            <c:chart xmlns:c="http://schemas.openxmlformats.org/drawingml/2006/chart" r:id="rId1"/>
+          </a:graphicData>
+        </a:graphic>
+      </p:graphicFrame>
+      <p:sp>
+        <p:nvSpPr>
+          <p:cNvPr id="16" name="Text 13"/>
+          <p:cNvSpPr/>
+          <p:nvPr/>
+        </p:nvSpPr>
+        <p:spPr>
+          <a:xfrm>
+            <a:off x="6263640" y="3675888"/>
+            <a:ext cx="5513832" cy="237744"/>
+          </a:xfrm>
+          <a:prstGeom prst="rect">
+            <a:avLst/>
+          </a:prstGeom>
+          <a:noFill/>
+          <a:ln/>
+        </p:spPr>
+        <p:txBody>
+          <a:bodyPr wrap="square" rtlCol="0" anchor="ctr"/>
+          <a:lstStyle/>
+          <a:p>
+            <a:pPr indent="0" marL="0">
+              <a:buNone/>
+            </a:pPr>
+            <a:r>
+              <a:rPr lang="en-US" sz="1000" b="1" spc="100" kern="0" dirty="0">
+                <a:solidFill>
+                  <a:srgbClr val="63666A"/>
+                </a:solidFill>
+                <a:latin typeface="Arial" pitchFamily="34" charset="0"/>
+                <a:ea typeface="Arial" pitchFamily="34" charset="-122"/>
+                <a:cs typeface="Arial" pitchFamily="34" charset="-120"/>
+              </a:rPr>
+              <a:t>EBITDA MARGIN, %</a:t>
+            </a:r>
+            <a:endParaRPr lang="en-US" sz="1000" dirty="0"/>
+          </a:p>
+        </p:txBody>
+      </p:sp>
+      <p:graphicFrame>
+        <p:nvGraphicFramePr>
+          <p:cNvPr id="17" name="Chart 1" descr=""/>
+          <p:cNvGraphicFramePr/>
+          <p:nvPr/>
+        </p:nvGraphicFramePr>
+        <p:xfrm>
+          <a:off x="6263640" y="3931920"/>
+          <a:ext cx="5513832" cy="1783080"/>
+        </p:xfrm>
+        <a:graphic xmlns:a="http://schemas.openxmlformats.org/drawingml/2006/main">
+          <a:graphicData uri="http://schemas.openxmlformats.org/drawingml/2006/chart">
+            <c:chart xmlns:c="http://schemas.openxmlformats.org/drawingml/2006/chart" r:id="rId2"/>
+          </a:graphicData>
+        </a:graphic>
+      </p:graphicFrame>
       <p:sp>
         <p:nvSpPr>
           <p:cNvPr id="25" name="Slide Number Placeholder 0"/>

--- a/samples/financial_Presentation.pptx
+++ b/samples/financial_Presentation.pptx
@@ -2414,7 +2414,7 @@
           <a:p>
             <a:pPr indent="0" marL="0">
               <a:lnSpc>
-                <a:spcPts val="2100"/>
+                <a:spcPts val="2040"/>
               </a:lnSpc>
               <a:buNone/>
             </a:pPr>
@@ -2434,7 +2434,7 @@
           <a:p>
             <a:pPr indent="0" marL="0">
               <a:lnSpc>
-                <a:spcPts val="2100"/>
+                <a:spcPts val="2040"/>
               </a:lnSpc>
               <a:buNone/>
             </a:pPr>
@@ -2454,7 +2454,7 @@
           <a:p>
             <a:pPr indent="0" marL="0">
               <a:lnSpc>
-                <a:spcPts val="2100"/>
+                <a:spcPts val="2040"/>
               </a:lnSpc>
               <a:buNone/>
             </a:pPr>
@@ -2537,7 +2537,7 @@
           <a:p>
             <a:pPr indent="0" marL="0">
               <a:lnSpc>
-                <a:spcPts val="2100"/>
+                <a:spcPts val="2040"/>
               </a:lnSpc>
               <a:buNone/>
             </a:pPr>
@@ -2557,7 +2557,7 @@
           <a:p>
             <a:pPr indent="0" marL="0">
               <a:lnSpc>
-                <a:spcPts val="2100"/>
+                <a:spcPts val="2040"/>
               </a:lnSpc>
               <a:buNone/>
             </a:pPr>
@@ -2577,7 +2577,7 @@
           <a:p>
             <a:pPr indent="0" marL="0">
               <a:lnSpc>
-                <a:spcPts val="2100"/>
+                <a:spcPts val="2040"/>
               </a:lnSpc>
               <a:buNone/>
             </a:pPr>
@@ -4919,7 +4919,7 @@
           <a:p>
             <a:pPr indent="0" marL="0">
               <a:lnSpc>
-                <a:spcPts val="2000"/>
+                <a:spcPts val="1980"/>
               </a:lnSpc>
               <a:buNone/>
             </a:pPr>
@@ -4939,7 +4939,7 @@
           <a:p>
             <a:pPr indent="0" marL="0">
               <a:lnSpc>
-                <a:spcPts val="2000"/>
+                <a:spcPts val="1980"/>
               </a:lnSpc>
               <a:buNone/>
             </a:pPr>
@@ -4959,7 +4959,7 @@
           <a:p>
             <a:pPr indent="0" marL="0">
               <a:lnSpc>
-                <a:spcPts val="2000"/>
+                <a:spcPts val="1980"/>
               </a:lnSpc>
               <a:buNone/>
             </a:pPr>
@@ -4979,7 +4979,7 @@
           <a:p>
             <a:pPr indent="0" marL="0">
               <a:lnSpc>
-                <a:spcPts val="2000"/>
+                <a:spcPts val="1980"/>
               </a:lnSpc>
               <a:buNone/>
             </a:pPr>
@@ -4999,7 +4999,7 @@
           <a:p>
             <a:pPr indent="0" marL="0">
               <a:lnSpc>
-                <a:spcPts val="2000"/>
+                <a:spcPts val="1980"/>
               </a:lnSpc>
               <a:buNone/>
             </a:pPr>
@@ -5019,7 +5019,7 @@
           <a:p>
             <a:pPr indent="0" marL="0">
               <a:lnSpc>
-                <a:spcPts val="2000"/>
+                <a:spcPts val="1980"/>
               </a:lnSpc>
               <a:buNone/>
             </a:pPr>

--- a/samples/financial_Presentation.pptx
+++ b/samples/financial_Presentation.pptx
@@ -14,8 +14,8 @@
   <p:notesMasterIdLst>
     <p:notesMasterId r:id="rId7"/>
   </p:notesMasterIdLst>
-  <p:sldSz cx="9144000" cy="5143500"/>
-  <p:notesSz cx="5143500" cy="9144000"/>
+  <p:sldSz cx="12191695" cy="6858000"/>
+  <p:notesSz cx="6858000" cy="12191695"/>
   <p:defaultTextStyle>
     <a:lvl1pPr marL="0" algn="l" defTabSz="914400" rtl="0" eaLnBrk="1" latinLnBrk="0" hangingPunct="1">
       <a:defRPr sz="1800" kern="1200">
@@ -2157,7 +2157,7 @@
         <p:spPr>
           <a:xfrm>
             <a:off x="411480" y="457200"/>
-            <a:ext cx="11365992" cy="822960"/>
+            <a:ext cx="11368735" cy="822960"/>
           </a:xfrm>
           <a:prstGeom prst="rect">
             <a:avLst/>
@@ -2198,7 +2198,7 @@
         <p:spPr>
           <a:xfrm>
             <a:off x="411480" y="5870448"/>
-            <a:ext cx="11365992" cy="475488"/>
+            <a:ext cx="11368735" cy="475488"/>
           </a:xfrm>
           <a:prstGeom prst="rect">
             <a:avLst/>
@@ -2238,7 +2238,7 @@
         <p:spPr>
           <a:xfrm>
             <a:off x="576072" y="5870448"/>
-            <a:ext cx="11091672" cy="475488"/>
+            <a:ext cx="11094415" cy="475488"/>
           </a:xfrm>
           <a:prstGeom prst="rect">
             <a:avLst/>
@@ -2605,7 +2605,7 @@
         <p:spPr>
           <a:xfrm>
             <a:off x="6263640" y="1298448"/>
-            <a:ext cx="5513832" cy="237744"/>
+            <a:ext cx="5516575" cy="237744"/>
           </a:xfrm>
           <a:prstGeom prst="rect">
             <a:avLst/>
@@ -2643,7 +2643,7 @@
         </p:nvGraphicFramePr>
         <p:xfrm>
           <a:off x="6263640" y="1554480"/>
-          <a:ext cx="5513832" cy="1965960"/>
+          <a:ext cx="5516575" cy="1965960"/>
         </p:xfrm>
         <a:graphic xmlns:a="http://schemas.openxmlformats.org/drawingml/2006/main">
           <a:graphicData uri="http://schemas.openxmlformats.org/drawingml/2006/chart">
@@ -2660,7 +2660,7 @@
         <p:spPr>
           <a:xfrm>
             <a:off x="6263640" y="3675888"/>
-            <a:ext cx="5513832" cy="237744"/>
+            <a:ext cx="5516575" cy="237744"/>
           </a:xfrm>
           <a:prstGeom prst="rect">
             <a:avLst/>
@@ -2698,7 +2698,7 @@
         </p:nvGraphicFramePr>
         <p:xfrm>
           <a:off x="6263640" y="3931920"/>
-          <a:ext cx="5513832" cy="1783080"/>
+          <a:ext cx="5516575" cy="1783080"/>
         </p:xfrm>
         <a:graphic xmlns:a="http://schemas.openxmlformats.org/drawingml/2006/main">
           <a:graphicData uri="http://schemas.openxmlformats.org/drawingml/2006/chart">
@@ -2866,7 +2866,7 @@
         <p:spPr>
           <a:xfrm>
             <a:off x="411480" y="457200"/>
-            <a:ext cx="11365992" cy="822960"/>
+            <a:ext cx="11368735" cy="822960"/>
           </a:xfrm>
           <a:prstGeom prst="rect">
             <a:avLst/>
@@ -2907,7 +2907,7 @@
         <p:spPr>
           <a:xfrm>
             <a:off x="411480" y="5870448"/>
-            <a:ext cx="11365992" cy="475488"/>
+            <a:ext cx="11368735" cy="475488"/>
           </a:xfrm>
           <a:prstGeom prst="rect">
             <a:avLst/>
@@ -2947,7 +2947,7 @@
         <p:spPr>
           <a:xfrm>
             <a:off x="576072" y="5870448"/>
-            <a:ext cx="11091672" cy="475488"/>
+            <a:ext cx="11094415" cy="475488"/>
           </a:xfrm>
           <a:prstGeom prst="rect">
             <a:avLst/>
@@ -3598,7 +3598,7 @@
         <p:spPr>
           <a:xfrm>
             <a:off x="411480" y="457200"/>
-            <a:ext cx="11365992" cy="822960"/>
+            <a:ext cx="11368735" cy="822960"/>
           </a:xfrm>
           <a:prstGeom prst="rect">
             <a:avLst/>
@@ -3639,7 +3639,7 @@
         <p:spPr>
           <a:xfrm>
             <a:off x="411480" y="5870448"/>
-            <a:ext cx="11365992" cy="475488"/>
+            <a:ext cx="11368735" cy="475488"/>
           </a:xfrm>
           <a:prstGeom prst="rect">
             <a:avLst/>
@@ -3679,7 +3679,7 @@
         <p:spPr>
           <a:xfrm>
             <a:off x="576072" y="5870448"/>
-            <a:ext cx="11091672" cy="475488"/>
+            <a:ext cx="11094415" cy="475488"/>
           </a:xfrm>
           <a:prstGeom prst="rect">
             <a:avLst/>
@@ -4330,7 +4330,7 @@
         <p:spPr>
           <a:xfrm>
             <a:off x="411480" y="457200"/>
-            <a:ext cx="11365992" cy="822960"/>
+            <a:ext cx="11368735" cy="822960"/>
           </a:xfrm>
           <a:prstGeom prst="rect">
             <a:avLst/>

--- a/samples/financial_Presentation.pptx
+++ b/samples/financial_Presentation.pptx
@@ -1495,7 +1495,7 @@
         </p:nvSpPr>
         <p:spPr>
           <a:xfrm>
-            <a:off x="11475720" y="6601968"/>
+            <a:off x="11109960" y="6473952"/>
             <a:ext cx="800000" cy="300000"/>
           </a:xfrm>
           <a:prstGeom prst="rect">
@@ -1568,7 +1568,7 @@
         </p:nvSpPr>
         <p:spPr>
           <a:xfrm>
-            <a:off x="11475720" y="6601968"/>
+            <a:off x="11109960" y="6473952"/>
             <a:ext cx="800000" cy="300000"/>
           </a:xfrm>
           <a:prstGeom prst="rect">
@@ -2718,7 +2718,7 @@
         </p:nvSpPr>
         <p:spPr>
           <a:xfrm>
-            <a:off x="11475720" y="6601968"/>
+            <a:off x="11109960" y="6473952"/>
             <a:ext cx="800000" cy="300000"/>
           </a:xfrm>
           <a:prstGeom prst="rect">
@@ -3450,7 +3450,7 @@
         </p:nvSpPr>
         <p:spPr>
           <a:xfrm>
-            <a:off x="11475720" y="6601968"/>
+            <a:off x="11109960" y="6473952"/>
             <a:ext cx="800000" cy="300000"/>
           </a:xfrm>
           <a:prstGeom prst="rect">
@@ -4182,7 +4182,7 @@
         </p:nvSpPr>
         <p:spPr>
           <a:xfrm>
-            <a:off x="11475720" y="6601968"/>
+            <a:off x="11109960" y="6473952"/>
             <a:ext cx="800000" cy="300000"/>
           </a:xfrm>
           <a:prstGeom prst="rect">
@@ -5131,7 +5131,7 @@
         </p:nvSpPr>
         <p:spPr>
           <a:xfrm>
-            <a:off x="11475720" y="6601968"/>
+            <a:off x="11109960" y="6473952"/>
             <a:ext cx="800000" cy="300000"/>
           </a:xfrm>
           <a:prstGeom prst="rect">

--- a/samples/financial_Presentation.pptx
+++ b/samples/financial_Presentation.pptx
@@ -9,10 +9,9 @@
     <p:sldId id="257" r:id="rId3"/>
     <p:sldId id="258" r:id="rId4"/>
     <p:sldId id="259" r:id="rId5"/>
-    <p:sldId id="260" r:id="rId6"/>
   </p:sldIdLst>
   <p:notesMasterIdLst>
-    <p:notesMasterId r:id="rId7"/>
+    <p:notesMasterId r:id="rId6"/>
   </p:notesMasterIdLst>
   <p:sldSz cx="12191695" cy="6858000"/>
   <p:notesSz cx="6858000" cy="12191695"/>
@@ -1284,94 +1283,6 @@
             <a:fld id="{F7021451-1387-4CA6-816F-3879F97B5CBC}" type="slidenum">
               <a:rPr lang="en-US"/>
               <a:t>4</a:t>
-            </a:fld>
-            <a:endParaRPr lang="en-US"/>
-          </a:p>
-        </p:txBody>
-      </p:sp>
-    </p:spTree>
-    <p:extLst>
-      <p:ext uri="{BB962C8B-B14F-4D97-AF65-F5344CB8AC3E}">
-        <p14:creationId xmlns:p14="http://schemas.microsoft.com/office/powerpoint/2010/main" val="1024086991"/>
-      </p:ext>
-    </p:extLst>
-  </p:cSld>
-  <p:clrMapOvr>
-    <a:masterClrMapping/>
-  </p:clrMapOvr>
-</p:notes>
-</file>
-
-<file path=ppt/notesSlides/notesSlide5.xml><?xml version="1.0" encoding="utf-8"?>
-<p:notes xmlns:a="http://schemas.openxmlformats.org/drawingml/2006/main" xmlns:r="http://schemas.openxmlformats.org/officeDocument/2006/relationships" xmlns:p="http://schemas.openxmlformats.org/presentationml/2006/main">
-  <p:cSld>
-    <p:spTree>
-      <p:nvGrpSpPr>
-        <p:cNvPr id="1" name=""/>
-        <p:cNvGrpSpPr/>
-        <p:nvPr/>
-      </p:nvGrpSpPr>
-      <p:grpSpPr>
-        <a:xfrm>
-          <a:off x="0" y="0"/>
-          <a:ext cx="0" cy="0"/>
-          <a:chOff x="0" y="0"/>
-          <a:chExt cx="0" cy="0"/>
-        </a:xfrm>
-      </p:grpSpPr>
-      <p:sp>
-        <p:nvSpPr>
-          <p:cNvPr id="2" name="Slide Image Placeholder 1"/>
-          <p:cNvSpPr>
-            <a:spLocks noGrp="1" noRot="1" noChangeAspect="1"/>
-          </p:cNvSpPr>
-          <p:nvPr>
-            <p:ph type="sldImg"/>
-          </p:nvPr>
-        </p:nvSpPr>
-        <p:spPr/>
-      </p:sp>
-      <p:sp>
-        <p:nvSpPr>
-          <p:cNvPr id="3" name="Notes Placeholder 2"/>
-          <p:cNvSpPr>
-            <a:spLocks noGrp="1"/>
-          </p:cNvSpPr>
-          <p:nvPr>
-            <p:ph type="body" idx="1"/>
-          </p:nvPr>
-        </p:nvSpPr>
-        <p:spPr/>
-        <p:txBody>
-          <a:bodyPr/>
-          <a:lstStyle/>
-          <a:p>
-            <a:r>
-              <a:rPr lang="en-US" dirty="0"/>
-              <a:t/>
-            </a:r>
-            <a:endParaRPr lang="en-US" dirty="0"/>
-          </a:p>
-        </p:txBody>
-      </p:sp>
-      <p:sp>
-        <p:nvSpPr>
-          <p:cNvPr id="4" name="Slide Number Placeholder 3"/>
-          <p:cNvSpPr>
-            <a:spLocks noGrp="1"/>
-          </p:cNvSpPr>
-          <p:nvPr>
-            <p:ph type="sldNum" sz="quarter" idx="10"/>
-          </p:nvPr>
-        </p:nvSpPr>
-        <p:spPr/>
-        <p:txBody>
-          <a:bodyPr/>
-          <a:lstStyle/>
-          <a:p>
-            <a:fld id="{F7021451-1387-4CA6-816F-3879F97B5CBC}" type="slidenum">
-              <a:rPr lang="en-US"/>
-              <a:t>5</a:t>
             </a:fld>
             <a:endParaRPr lang="en-US"/>
           </a:p>
@@ -4213,955 +4124,6 @@
             <a:fld id="{F7021451-1387-4CA6-816F-3879F97B5CBC}" type="slidenum">
               <a:rPr b="0" lang="en-US"/>
               <a:t>4</a:t>
-            </a:fld>
-            <a:endParaRPr lang="en-US"/>
-          </a:p>
-        </p:txBody>
-      </p:sp>
-    </p:spTree>
-  </p:cSld>
-  <p:clrMapOvr>
-    <a:masterClrMapping/>
-  </p:clrMapOvr>
-</p:sld>
-</file>
-
-<file path=ppt/slides/slide5.xml><?xml version="1.0" encoding="utf-8"?>
-<p:sld xmlns:a="http://schemas.openxmlformats.org/drawingml/2006/main" xmlns:r="http://schemas.openxmlformats.org/officeDocument/2006/relationships" xmlns:p="http://schemas.openxmlformats.org/presentationml/2006/main">
-  <p:cSld name="Slide 5">
-    <p:spTree>
-      <p:nvGrpSpPr>
-        <p:cNvPr id="1" name=""/>
-        <p:cNvGrpSpPr/>
-        <p:nvPr/>
-      </p:nvGrpSpPr>
-      <p:grpSpPr>
-        <a:xfrm>
-          <a:off x="0" y="0"/>
-          <a:ext cx="0" cy="0"/>
-          <a:chOff x="0" y="0"/>
-          <a:chExt cx="0" cy="0"/>
-        </a:xfrm>
-      </p:grpSpPr>
-      <p:sp>
-        <p:nvSpPr>
-          <p:cNvPr id="2" name="Text 0"/>
-          <p:cNvSpPr/>
-          <p:nvPr/>
-        </p:nvSpPr>
-        <p:spPr>
-          <a:xfrm>
-            <a:off x="411480" y="164592"/>
-            <a:ext cx="8229600" cy="256032"/>
-          </a:xfrm>
-          <a:prstGeom prst="rect">
-            <a:avLst/>
-          </a:prstGeom>
-          <a:noFill/>
-          <a:ln/>
-        </p:spPr>
-        <p:txBody>
-          <a:bodyPr wrap="square" rtlCol="0" anchor="ctr"/>
-          <a:lstStyle/>
-          <a:p>
-            <a:pPr indent="0" marL="0">
-              <a:buNone/>
-            </a:pPr>
-            <a:r>
-              <a:rPr lang="en-US" sz="1000" b="1" spc="200" kern="0" dirty="0">
-                <a:solidFill>
-                  <a:srgbClr val="1F4CFF"/>
-                </a:solidFill>
-                <a:latin typeface="Arial" pitchFamily="34" charset="0"/>
-                <a:ea typeface="Arial" pitchFamily="34" charset="-122"/>
-                <a:cs typeface="Arial" pitchFamily="34" charset="-120"/>
-              </a:rPr>
-              <a:t>APPENDIX: PRIORITIZATION</a:t>
-            </a:r>
-            <a:endParaRPr lang="en-US" sz="1000" dirty="0"/>
-          </a:p>
-        </p:txBody>
-      </p:sp>
-      <p:sp>
-        <p:nvSpPr>
-          <p:cNvPr id="3" name="Text 1"/>
-          <p:cNvSpPr/>
-          <p:nvPr/>
-        </p:nvSpPr>
-        <p:spPr>
-          <a:xfrm>
-            <a:off x="9509760" y="164592"/>
-            <a:ext cx="2286000" cy="256032"/>
-          </a:xfrm>
-          <a:prstGeom prst="rect">
-            <a:avLst/>
-          </a:prstGeom>
-          <a:noFill/>
-          <a:ln/>
-        </p:spPr>
-        <p:txBody>
-          <a:bodyPr wrap="square" rtlCol="0" anchor="ctr"/>
-          <a:lstStyle/>
-          <a:p>
-            <a:pPr algn="r" indent="0" marL="0">
-              <a:buNone/>
-            </a:pPr>
-            <a:r>
-              <a:rPr lang="en-US" sz="900" dirty="0">
-                <a:solidFill>
-                  <a:srgbClr val="A6A6A6"/>
-                </a:solidFill>
-                <a:latin typeface="Arial" pitchFamily="34" charset="0"/>
-                <a:ea typeface="Arial" pitchFamily="34" charset="-122"/>
-                <a:cs typeface="Arial" pitchFamily="34" charset="-120"/>
-              </a:rPr>
-              <a:t>DRAFT | FOR DISCUSSION</a:t>
-            </a:r>
-            <a:endParaRPr lang="en-US" sz="900" dirty="0"/>
-          </a:p>
-        </p:txBody>
-      </p:sp>
-      <p:sp>
-        <p:nvSpPr>
-          <p:cNvPr id="4" name="Text 2"/>
-          <p:cNvSpPr/>
-          <p:nvPr/>
-        </p:nvSpPr>
-        <p:spPr>
-          <a:xfrm>
-            <a:off x="411480" y="457200"/>
-            <a:ext cx="11368735" cy="822960"/>
-          </a:xfrm>
-          <a:prstGeom prst="rect">
-            <a:avLst/>
-          </a:prstGeom>
-          <a:noFill/>
-          <a:ln/>
-        </p:spPr>
-        <p:txBody>
-          <a:bodyPr wrap="square" rtlCol="0" anchor="t">
-            <a:normAutofit/>
-          </a:bodyPr>
-          <a:lstStyle/>
-          <a:p>
-            <a:pPr indent="0" marL="0">
-              <a:buNone/>
-            </a:pPr>
-            <a:r>
-              <a:rPr lang="en-US" sz="1900" dirty="0">
-                <a:solidFill>
-                  <a:srgbClr val="0A1F2E"/>
-                </a:solidFill>
-                <a:latin typeface="Georgia" pitchFamily="34" charset="0"/>
-                <a:ea typeface="Georgia" pitchFamily="34" charset="-122"/>
-                <a:cs typeface="Georgia" pitchFamily="34" charset="-120"/>
-              </a:rPr>
-              <a:t>Pursue the top 3 opportunities first; hold the remainder for the roadmap</a:t>
-            </a:r>
-            <a:endParaRPr lang="en-US" sz="1900" dirty="0"/>
-          </a:p>
-        </p:txBody>
-      </p:sp>
-      <p:sp>
-        <p:nvSpPr>
-          <p:cNvPr id="5" name="Text 3"/>
-          <p:cNvSpPr/>
-          <p:nvPr/>
-        </p:nvSpPr>
-        <p:spPr>
-          <a:xfrm>
-            <a:off x="411480" y="6419088"/>
-            <a:ext cx="8229600" cy="228600"/>
-          </a:xfrm>
-          <a:prstGeom prst="rect">
-            <a:avLst/>
-          </a:prstGeom>
-          <a:noFill/>
-          <a:ln/>
-        </p:spPr>
-        <p:txBody>
-          <a:bodyPr wrap="square" rtlCol="0" anchor="ctr"/>
-          <a:lstStyle/>
-          <a:p>
-            <a:pPr indent="0" marL="0">
-              <a:buNone/>
-            </a:pPr>
-            <a:r>
-              <a:rPr lang="en-US" sz="800" dirty="0">
-                <a:solidFill>
-                  <a:srgbClr val="63666A"/>
-                </a:solidFill>
-                <a:latin typeface="Arial" pitchFamily="34" charset="0"/>
-                <a:ea typeface="Arial" pitchFamily="34" charset="-122"/>
-                <a:cs typeface="Arial" pitchFamily="34" charset="-120"/>
-              </a:rPr>
-              <a:t>Source: Illustrative sample financials; DealDesk analysis</a:t>
-            </a:r>
-            <a:endParaRPr lang="en-US" sz="800" dirty="0"/>
-          </a:p>
-        </p:txBody>
-      </p:sp>
-      <p:sp>
-        <p:nvSpPr>
-          <p:cNvPr id="6" name="Shape 4"/>
-          <p:cNvSpPr/>
-          <p:nvPr/>
-        </p:nvSpPr>
-        <p:spPr>
-          <a:xfrm>
-            <a:off x="1005840" y="1417320"/>
-            <a:ext cx="6400800" cy="4114800"/>
-          </a:xfrm>
-          <a:prstGeom prst="rect">
-            <a:avLst/>
-          </a:prstGeom>
-          <a:solidFill>
-            <a:srgbClr val="FAFBFC"/>
-          </a:solidFill>
-          <a:ln w="12700">
-            <a:solidFill>
-              <a:srgbClr val="D9D9D9"/>
-            </a:solidFill>
-            <a:prstDash val="solid"/>
-          </a:ln>
-        </p:spPr>
-      </p:sp>
-      <p:sp>
-        <p:nvSpPr>
-          <p:cNvPr id="7" name="Shape 5"/>
-          <p:cNvSpPr/>
-          <p:nvPr/>
-        </p:nvSpPr>
-        <p:spPr>
-          <a:xfrm>
-            <a:off x="4206240" y="1417320"/>
-            <a:ext cx="3200400" cy="2057400"/>
-          </a:xfrm>
-          <a:prstGeom prst="rect">
-            <a:avLst/>
-          </a:prstGeom>
-          <a:solidFill>
-            <a:srgbClr val="E8EDFF"/>
-          </a:solidFill>
-          <a:ln/>
-        </p:spPr>
-      </p:sp>
-      <p:sp>
-        <p:nvSpPr>
-          <p:cNvPr id="8" name="Shape 6"/>
-          <p:cNvSpPr/>
-          <p:nvPr/>
-        </p:nvSpPr>
-        <p:spPr>
-          <a:xfrm>
-            <a:off x="4206240" y="1417320"/>
-            <a:ext cx="0" cy="4114800"/>
-          </a:xfrm>
-          <a:prstGeom prst="line">
-            <a:avLst/>
-          </a:prstGeom>
-          <a:noFill/>
-          <a:ln w="12700">
-            <a:solidFill>
-              <a:srgbClr val="D9D9D9"/>
-            </a:solidFill>
-            <a:prstDash val="dash"/>
-          </a:ln>
-        </p:spPr>
-      </p:sp>
-      <p:sp>
-        <p:nvSpPr>
-          <p:cNvPr id="9" name="Shape 7"/>
-          <p:cNvSpPr/>
-          <p:nvPr/>
-        </p:nvSpPr>
-        <p:spPr>
-          <a:xfrm>
-            <a:off x="1005840" y="3474720"/>
-            <a:ext cx="6400800" cy="0"/>
-          </a:xfrm>
-          <a:prstGeom prst="line">
-            <a:avLst/>
-          </a:prstGeom>
-          <a:noFill/>
-          <a:ln w="12700">
-            <a:solidFill>
-              <a:srgbClr val="D9D9D9"/>
-            </a:solidFill>
-            <a:prstDash val="dash"/>
-          </a:ln>
-        </p:spPr>
-      </p:sp>
-      <p:sp>
-        <p:nvSpPr>
-          <p:cNvPr id="10" name="Text 8"/>
-          <p:cNvSpPr/>
-          <p:nvPr/>
-        </p:nvSpPr>
-        <p:spPr>
-          <a:xfrm>
-            <a:off x="4206240" y="1463040"/>
-            <a:ext cx="3108960" cy="274320"/>
-          </a:xfrm>
-          <a:prstGeom prst="rect">
-            <a:avLst/>
-          </a:prstGeom>
-          <a:noFill/>
-          <a:ln/>
-        </p:spPr>
-        <p:txBody>
-          <a:bodyPr wrap="square" rtlCol="0" anchor="ctr"/>
-          <a:lstStyle/>
-          <a:p>
-            <a:pPr algn="r" indent="0" marL="0">
-              <a:buNone/>
-            </a:pPr>
-            <a:r>
-              <a:rPr lang="en-US" sz="1000" b="1" dirty="0">
-                <a:solidFill>
-                  <a:srgbClr val="1F4CFF"/>
-                </a:solidFill>
-                <a:latin typeface="Arial" pitchFamily="34" charset="0"/>
-                <a:ea typeface="Arial" pitchFamily="34" charset="-122"/>
-                <a:cs typeface="Arial" pitchFamily="34" charset="-120"/>
-              </a:rPr>
-              <a:t>Do first</a:t>
-            </a:r>
-            <a:endParaRPr lang="en-US" sz="1000" dirty="0"/>
-          </a:p>
-        </p:txBody>
-      </p:sp>
-      <p:sp>
-        <p:nvSpPr>
-          <p:cNvPr id="11" name="Text 9"/>
-          <p:cNvSpPr/>
-          <p:nvPr/>
-        </p:nvSpPr>
-        <p:spPr>
-          <a:xfrm rot="16200000">
-            <a:off x="137160" y="3291840"/>
-            <a:ext cx="1554480" cy="365760"/>
-          </a:xfrm>
-          <a:prstGeom prst="rect">
-            <a:avLst/>
-          </a:prstGeom>
-          <a:noFill/>
-          <a:ln/>
-        </p:spPr>
-        <p:txBody>
-          <a:bodyPr wrap="square" rtlCol="0" anchor="ctr"/>
-          <a:lstStyle/>
-          <a:p>
-            <a:pPr algn="ctr" indent="0" marL="0">
-              <a:buNone/>
-            </a:pPr>
-            <a:r>
-              <a:rPr lang="en-US" sz="1100" dirty="0">
-                <a:solidFill>
-                  <a:srgbClr val="63666A"/>
-                </a:solidFill>
-                <a:latin typeface="Arial" pitchFamily="34" charset="0"/>
-                <a:ea typeface="Arial" pitchFamily="34" charset="-122"/>
-                <a:cs typeface="Arial" pitchFamily="34" charset="-120"/>
-              </a:rPr>
-              <a:t>Value impact</a:t>
-            </a:r>
-            <a:endParaRPr lang="en-US" sz="1100" dirty="0"/>
-          </a:p>
-        </p:txBody>
-      </p:sp>
-      <p:sp>
-        <p:nvSpPr>
-          <p:cNvPr id="12" name="Text 10"/>
-          <p:cNvSpPr/>
-          <p:nvPr/>
-        </p:nvSpPr>
-        <p:spPr>
-          <a:xfrm>
-            <a:off x="1005840" y="5623560"/>
-            <a:ext cx="6400800" cy="274320"/>
-          </a:xfrm>
-          <a:prstGeom prst="rect">
-            <a:avLst/>
-          </a:prstGeom>
-          <a:noFill/>
-          <a:ln/>
-        </p:spPr>
-        <p:txBody>
-          <a:bodyPr wrap="square" rtlCol="0" anchor="ctr"/>
-          <a:lstStyle/>
-          <a:p>
-            <a:pPr algn="ctr" indent="0" marL="0">
-              <a:buNone/>
-            </a:pPr>
-            <a:r>
-              <a:rPr lang="en-US" sz="1100" dirty="0">
-                <a:solidFill>
-                  <a:srgbClr val="63666A"/>
-                </a:solidFill>
-                <a:latin typeface="Arial" pitchFamily="34" charset="0"/>
-                <a:ea typeface="Arial" pitchFamily="34" charset="-122"/>
-                <a:cs typeface="Arial" pitchFamily="34" charset="-120"/>
-              </a:rPr>
-              <a:t>Ease of capture</a:t>
-            </a:r>
-            <a:endParaRPr lang="en-US" sz="1100" dirty="0"/>
-          </a:p>
-        </p:txBody>
-      </p:sp>
-      <p:sp>
-        <p:nvSpPr>
-          <p:cNvPr id="13" name="Text 11"/>
-          <p:cNvSpPr/>
-          <p:nvPr/>
-        </p:nvSpPr>
-        <p:spPr>
-          <a:xfrm>
-            <a:off x="4014216" y="2048256"/>
-            <a:ext cx="384048" cy="384048"/>
-          </a:xfrm>
-          <a:prstGeom prst="ellipse">
-            <a:avLst/>
-          </a:prstGeom>
-          <a:solidFill>
-            <a:srgbClr val="00A0B0"/>
-          </a:solidFill>
-          <a:ln/>
-        </p:spPr>
-        <p:txBody>
-          <a:bodyPr wrap="square" rtlCol="0" anchor="ctr"/>
-          <a:lstStyle/>
-          <a:p>
-            <a:pPr algn="ctr" indent="0" marL="0">
-              <a:buNone/>
-            </a:pPr>
-            <a:r>
-              <a:rPr lang="en-US" sz="1200" b="1" dirty="0">
-                <a:solidFill>
-                  <a:srgbClr val="FFFFFF"/>
-                </a:solidFill>
-                <a:latin typeface="Arial" pitchFamily="34" charset="0"/>
-                <a:ea typeface="Arial" pitchFamily="34" charset="-122"/>
-                <a:cs typeface="Arial" pitchFamily="34" charset="-120"/>
-              </a:rPr>
-              <a:t>1</a:t>
-            </a:r>
-            <a:endParaRPr lang="en-US" sz="1200" dirty="0"/>
-          </a:p>
-        </p:txBody>
-      </p:sp>
-      <p:sp>
-        <p:nvSpPr>
-          <p:cNvPr id="14" name="Text 12"/>
-          <p:cNvSpPr/>
-          <p:nvPr/>
-        </p:nvSpPr>
-        <p:spPr>
-          <a:xfrm>
-            <a:off x="5934456" y="3282696"/>
-            <a:ext cx="384048" cy="384048"/>
-          </a:xfrm>
-          <a:prstGeom prst="ellipse">
-            <a:avLst/>
-          </a:prstGeom>
-          <a:solidFill>
-            <a:srgbClr val="00A0B0"/>
-          </a:solidFill>
-          <a:ln/>
-        </p:spPr>
-        <p:txBody>
-          <a:bodyPr wrap="square" rtlCol="0" anchor="ctr"/>
-          <a:lstStyle/>
-          <a:p>
-            <a:pPr algn="ctr" indent="0" marL="0">
-              <a:buNone/>
-            </a:pPr>
-            <a:r>
-              <a:rPr lang="en-US" sz="1200" b="1" dirty="0">
-                <a:solidFill>
-                  <a:srgbClr val="FFFFFF"/>
-                </a:solidFill>
-                <a:latin typeface="Arial" pitchFamily="34" charset="0"/>
-                <a:ea typeface="Arial" pitchFamily="34" charset="-122"/>
-                <a:cs typeface="Arial" pitchFamily="34" charset="-120"/>
-              </a:rPr>
-              <a:t>2</a:t>
-            </a:r>
-            <a:endParaRPr lang="en-US" sz="1200" dirty="0"/>
-          </a:p>
-        </p:txBody>
-      </p:sp>
-      <p:sp>
-        <p:nvSpPr>
-          <p:cNvPr id="15" name="Text 13"/>
-          <p:cNvSpPr/>
-          <p:nvPr/>
-        </p:nvSpPr>
-        <p:spPr>
-          <a:xfrm>
-            <a:off x="4517136" y="2048256"/>
-            <a:ext cx="384048" cy="384048"/>
-          </a:xfrm>
-          <a:prstGeom prst="ellipse">
-            <a:avLst/>
-          </a:prstGeom>
-          <a:solidFill>
-            <a:srgbClr val="00A0B0"/>
-          </a:solidFill>
-          <a:ln/>
-        </p:spPr>
-        <p:txBody>
-          <a:bodyPr wrap="square" rtlCol="0" anchor="ctr"/>
-          <a:lstStyle/>
-          <a:p>
-            <a:pPr algn="ctr" indent="0" marL="0">
-              <a:buNone/>
-            </a:pPr>
-            <a:r>
-              <a:rPr lang="en-US" sz="1200" b="1" dirty="0">
-                <a:solidFill>
-                  <a:srgbClr val="FFFFFF"/>
-                </a:solidFill>
-                <a:latin typeface="Arial" pitchFamily="34" charset="0"/>
-                <a:ea typeface="Arial" pitchFamily="34" charset="-122"/>
-                <a:cs typeface="Arial" pitchFamily="34" charset="-120"/>
-              </a:rPr>
-              <a:t>3</a:t>
-            </a:r>
-            <a:endParaRPr lang="en-US" sz="1200" dirty="0"/>
-          </a:p>
-        </p:txBody>
-      </p:sp>
-      <p:sp>
-        <p:nvSpPr>
-          <p:cNvPr id="16" name="Text 14"/>
-          <p:cNvSpPr/>
-          <p:nvPr/>
-        </p:nvSpPr>
-        <p:spPr>
-          <a:xfrm>
-            <a:off x="5934456" y="2048256"/>
-            <a:ext cx="384048" cy="384048"/>
-          </a:xfrm>
-          <a:prstGeom prst="ellipse">
-            <a:avLst/>
-          </a:prstGeom>
-          <a:solidFill>
-            <a:srgbClr val="1F4CFF"/>
-          </a:solidFill>
-          <a:ln/>
-        </p:spPr>
-        <p:txBody>
-          <a:bodyPr wrap="square" rtlCol="0" anchor="ctr"/>
-          <a:lstStyle/>
-          <a:p>
-            <a:pPr algn="ctr" indent="0" marL="0">
-              <a:buNone/>
-            </a:pPr>
-            <a:r>
-              <a:rPr lang="en-US" sz="1200" b="1" dirty="0">
-                <a:solidFill>
-                  <a:srgbClr val="FFFFFF"/>
-                </a:solidFill>
-                <a:latin typeface="Arial" pitchFamily="34" charset="0"/>
-                <a:ea typeface="Arial" pitchFamily="34" charset="-122"/>
-                <a:cs typeface="Arial" pitchFamily="34" charset="-120"/>
-              </a:rPr>
-              <a:t>4</a:t>
-            </a:r>
-            <a:endParaRPr lang="en-US" sz="1200" dirty="0"/>
-          </a:p>
-        </p:txBody>
-      </p:sp>
-      <p:sp>
-        <p:nvSpPr>
-          <p:cNvPr id="17" name="Text 15"/>
-          <p:cNvSpPr/>
-          <p:nvPr/>
-        </p:nvSpPr>
-        <p:spPr>
-          <a:xfrm>
-            <a:off x="5020056" y="2048256"/>
-            <a:ext cx="384048" cy="384048"/>
-          </a:xfrm>
-          <a:prstGeom prst="ellipse">
-            <a:avLst/>
-          </a:prstGeom>
-          <a:solidFill>
-            <a:srgbClr val="1F4CFF"/>
-          </a:solidFill>
-          <a:ln/>
-        </p:spPr>
-        <p:txBody>
-          <a:bodyPr wrap="square" rtlCol="0" anchor="ctr"/>
-          <a:lstStyle/>
-          <a:p>
-            <a:pPr algn="ctr" indent="0" marL="0">
-              <a:buNone/>
-            </a:pPr>
-            <a:r>
-              <a:rPr lang="en-US" sz="1200" b="1" dirty="0">
-                <a:solidFill>
-                  <a:srgbClr val="FFFFFF"/>
-                </a:solidFill>
-                <a:latin typeface="Arial" pitchFamily="34" charset="0"/>
-                <a:ea typeface="Arial" pitchFamily="34" charset="-122"/>
-                <a:cs typeface="Arial" pitchFamily="34" charset="-120"/>
-              </a:rPr>
-              <a:t>5</a:t>
-            </a:r>
-            <a:endParaRPr lang="en-US" sz="1200" dirty="0"/>
-          </a:p>
-        </p:txBody>
-      </p:sp>
-      <p:sp>
-        <p:nvSpPr>
-          <p:cNvPr id="18" name="Text 16"/>
-          <p:cNvSpPr/>
-          <p:nvPr/>
-        </p:nvSpPr>
-        <p:spPr>
-          <a:xfrm>
-            <a:off x="4014216" y="3282696"/>
-            <a:ext cx="384048" cy="384048"/>
-          </a:xfrm>
-          <a:prstGeom prst="ellipse">
-            <a:avLst/>
-          </a:prstGeom>
-          <a:solidFill>
-            <a:srgbClr val="1F4CFF"/>
-          </a:solidFill>
-          <a:ln/>
-        </p:spPr>
-        <p:txBody>
-          <a:bodyPr wrap="square" rtlCol="0" anchor="ctr"/>
-          <a:lstStyle/>
-          <a:p>
-            <a:pPr algn="ctr" indent="0" marL="0">
-              <a:buNone/>
-            </a:pPr>
-            <a:r>
-              <a:rPr lang="en-US" sz="1200" b="1" dirty="0">
-                <a:solidFill>
-                  <a:srgbClr val="FFFFFF"/>
-                </a:solidFill>
-                <a:latin typeface="Arial" pitchFamily="34" charset="0"/>
-                <a:ea typeface="Arial" pitchFamily="34" charset="-122"/>
-                <a:cs typeface="Arial" pitchFamily="34" charset="-120"/>
-              </a:rPr>
-              <a:t>6</a:t>
-            </a:r>
-            <a:endParaRPr lang="en-US" sz="1200" dirty="0"/>
-          </a:p>
-        </p:txBody>
-      </p:sp>
-      <p:sp>
-        <p:nvSpPr>
-          <p:cNvPr id="19" name="Text 17"/>
-          <p:cNvSpPr/>
-          <p:nvPr/>
-        </p:nvSpPr>
-        <p:spPr>
-          <a:xfrm>
-            <a:off x="7818120" y="1417320"/>
-            <a:ext cx="3931920" cy="274320"/>
-          </a:xfrm>
-          <a:prstGeom prst="rect">
-            <a:avLst/>
-          </a:prstGeom>
-          <a:noFill/>
-          <a:ln/>
-        </p:spPr>
-        <p:txBody>
-          <a:bodyPr wrap="square" rtlCol="0" anchor="ctr"/>
-          <a:lstStyle/>
-          <a:p>
-            <a:pPr indent="0" marL="0">
-              <a:buNone/>
-            </a:pPr>
-            <a:r>
-              <a:rPr lang="en-US" sz="1100" b="1" dirty="0">
-                <a:solidFill>
-                  <a:srgbClr val="0A1F2E"/>
-                </a:solidFill>
-                <a:latin typeface="Arial" pitchFamily="34" charset="0"/>
-                <a:ea typeface="Arial" pitchFamily="34" charset="-122"/>
-                <a:cs typeface="Arial" pitchFamily="34" charset="-120"/>
-              </a:rPr>
-              <a:t>Opportunities</a:t>
-            </a:r>
-            <a:endParaRPr lang="en-US" sz="1100" dirty="0"/>
-          </a:p>
-        </p:txBody>
-      </p:sp>
-      <p:sp>
-        <p:nvSpPr>
-          <p:cNvPr id="20" name="Text 18"/>
-          <p:cNvSpPr/>
-          <p:nvPr/>
-        </p:nvSpPr>
-        <p:spPr>
-          <a:xfrm>
-            <a:off x="7818120" y="1737360"/>
-            <a:ext cx="3931920" cy="3840480"/>
-          </a:xfrm>
-          <a:prstGeom prst="rect">
-            <a:avLst/>
-          </a:prstGeom>
-          <a:noFill/>
-          <a:ln/>
-        </p:spPr>
-        <p:txBody>
-          <a:bodyPr wrap="square" rtlCol="0" anchor="t">
-            <a:normAutofit/>
-          </a:bodyPr>
-          <a:lstStyle/>
-          <a:p>
-            <a:pPr indent="0" marL="0">
-              <a:lnSpc>
-                <a:spcPts val="1980"/>
-              </a:lnSpc>
-              <a:buNone/>
-            </a:pPr>
-            <a:r>
-              <a:rPr lang="en-US" sz="1100" dirty="0">
-                <a:solidFill>
-                  <a:srgbClr val="404850"/>
-                </a:solidFill>
-                <a:latin typeface="Arial" pitchFamily="34" charset="0"/>
-                <a:ea typeface="Arial" pitchFamily="34" charset="-122"/>
-                <a:cs typeface="Arial" pitchFamily="34" charset="-120"/>
-              </a:rPr>
-              <a:t>1. Cross sell into the combined customer base</a:t>
-            </a:r>
-            <a:endParaRPr lang="en-US" sz="1100" dirty="0"/>
-          </a:p>
-          <a:p>
-            <a:pPr indent="0" marL="0">
-              <a:lnSpc>
-                <a:spcPts val="1980"/>
-              </a:lnSpc>
-              <a:buNone/>
-            </a:pPr>
-            <a:r>
-              <a:rPr lang="en-US" sz="1100" dirty="0">
-                <a:solidFill>
-                  <a:srgbClr val="404850"/>
-                </a:solidFill>
-                <a:latin typeface="Arial" pitchFamily="34" charset="0"/>
-                <a:ea typeface="Arial" pitchFamily="34" charset="-122"/>
-                <a:cs typeface="Arial" pitchFamily="34" charset="-120"/>
-              </a:rPr>
-              <a:t>2. Pricing harmonization</a:t>
-            </a:r>
-            <a:endParaRPr lang="en-US" sz="1100" dirty="0"/>
-          </a:p>
-          <a:p>
-            <a:pPr indent="0" marL="0">
-              <a:lnSpc>
-                <a:spcPts val="1980"/>
-              </a:lnSpc>
-              <a:buNone/>
-            </a:pPr>
-            <a:r>
-              <a:rPr lang="en-US" sz="1100" dirty="0">
-                <a:solidFill>
-                  <a:srgbClr val="404850"/>
-                </a:solidFill>
-                <a:latin typeface="Arial" pitchFamily="34" charset="0"/>
-                <a:ea typeface="Arial" pitchFamily="34" charset="-122"/>
-                <a:cs typeface="Arial" pitchFamily="34" charset="-120"/>
-              </a:rPr>
-              <a:t>3. Key account retention program</a:t>
-            </a:r>
-            <a:endParaRPr lang="en-US" sz="1100" dirty="0"/>
-          </a:p>
-          <a:p>
-            <a:pPr indent="0" marL="0">
-              <a:lnSpc>
-                <a:spcPts val="1980"/>
-              </a:lnSpc>
-              <a:buNone/>
-            </a:pPr>
-            <a:r>
-              <a:rPr lang="en-US" sz="1100" dirty="0">
-                <a:solidFill>
-                  <a:srgbClr val="404850"/>
-                </a:solidFill>
-                <a:latin typeface="Arial" pitchFamily="34" charset="0"/>
-                <a:ea typeface="Arial" pitchFamily="34" charset="-122"/>
-                <a:cs typeface="Arial" pitchFamily="34" charset="-120"/>
-              </a:rPr>
-              <a:t>4. Procurement scale and vendor consolidation</a:t>
-            </a:r>
-            <a:endParaRPr lang="en-US" sz="1100" dirty="0"/>
-          </a:p>
-          <a:p>
-            <a:pPr indent="0" marL="0">
-              <a:lnSpc>
-                <a:spcPts val="1980"/>
-              </a:lnSpc>
-              <a:buNone/>
-            </a:pPr>
-            <a:r>
-              <a:rPr lang="en-US" sz="1100" dirty="0">
-                <a:solidFill>
-                  <a:srgbClr val="404850"/>
-                </a:solidFill>
-                <a:latin typeface="Arial" pitchFamily="34" charset="0"/>
-                <a:ea typeface="Arial" pitchFamily="34" charset="-122"/>
-                <a:cs typeface="Arial" pitchFamily="34" charset="-120"/>
-              </a:rPr>
-              <a:t>5. Margin improvement to peer levels</a:t>
-            </a:r>
-            <a:endParaRPr lang="en-US" sz="1100" dirty="0"/>
-          </a:p>
-          <a:p>
-            <a:pPr indent="0" marL="0">
-              <a:lnSpc>
-                <a:spcPts val="1980"/>
-              </a:lnSpc>
-              <a:buNone/>
-            </a:pPr>
-            <a:r>
-              <a:rPr lang="en-US" sz="1100" dirty="0">
-                <a:solidFill>
-                  <a:srgbClr val="404850"/>
-                </a:solidFill>
-                <a:latin typeface="Arial" pitchFamily="34" charset="0"/>
-                <a:ea typeface="Arial" pitchFamily="34" charset="-122"/>
-                <a:cs typeface="Arial" pitchFamily="34" charset="-120"/>
-              </a:rPr>
-              <a:t>6. Overlapping G&amp;A rationalization</a:t>
-            </a:r>
-            <a:endParaRPr lang="en-US" sz="1100" dirty="0"/>
-          </a:p>
-        </p:txBody>
-      </p:sp>
-      <p:sp>
-        <p:nvSpPr>
-          <p:cNvPr id="21" name="Text 19"/>
-          <p:cNvSpPr/>
-          <p:nvPr/>
-        </p:nvSpPr>
-        <p:spPr>
-          <a:xfrm>
-            <a:off x="7818120" y="5212080"/>
-            <a:ext cx="3657600" cy="274320"/>
-          </a:xfrm>
-          <a:prstGeom prst="rect">
-            <a:avLst/>
-          </a:prstGeom>
-          <a:noFill/>
-          <a:ln/>
-        </p:spPr>
-        <p:txBody>
-          <a:bodyPr wrap="square" rtlCol="0" anchor="ctr"/>
-          <a:lstStyle/>
-          <a:p>
-            <a:pPr indent="0" marL="0">
-              <a:buNone/>
-            </a:pPr>
-            <a:r>
-              <a:rPr lang="en-US" sz="1000" dirty="0">
-                <a:solidFill>
-                  <a:srgbClr val="00A0B0"/>
-                </a:solidFill>
-                <a:latin typeface="Arial" pitchFamily="34" charset="0"/>
-                <a:ea typeface="Arial" pitchFamily="34" charset="-122"/>
-                <a:cs typeface="Arial" pitchFamily="34" charset="-120"/>
-              </a:rPr>
-              <a:t>● </a:t>
-            </a:r>
-            <a:pPr indent="0" marL="0">
-              <a:buNone/>
-            </a:pPr>
-            <a:r>
-              <a:rPr lang="en-US" sz="1000" dirty="0">
-                <a:solidFill>
-                  <a:srgbClr val="63666A"/>
-                </a:solidFill>
-                <a:latin typeface="Arial" pitchFamily="34" charset="0"/>
-                <a:ea typeface="Arial" pitchFamily="34" charset="-122"/>
-                <a:cs typeface="Arial" pitchFamily="34" charset="-120"/>
-              </a:rPr>
-              <a:t>Revenue synergies   </a:t>
-            </a:r>
-            <a:pPr indent="0" marL="0">
-              <a:buNone/>
-            </a:pPr>
-            <a:r>
-              <a:rPr lang="en-US" sz="1000" dirty="0">
-                <a:solidFill>
-                  <a:srgbClr val="1F4CFF"/>
-                </a:solidFill>
-                <a:latin typeface="Arial" pitchFamily="34" charset="0"/>
-                <a:ea typeface="Arial" pitchFamily="34" charset="-122"/>
-                <a:cs typeface="Arial" pitchFamily="34" charset="-120"/>
-              </a:rPr>
-              <a:t>● </a:t>
-            </a:r>
-            <a:pPr indent="0" marL="0">
-              <a:buNone/>
-            </a:pPr>
-            <a:r>
-              <a:rPr lang="en-US" sz="1000" dirty="0">
-                <a:solidFill>
-                  <a:srgbClr val="63666A"/>
-                </a:solidFill>
-                <a:latin typeface="Arial" pitchFamily="34" charset="0"/>
-                <a:ea typeface="Arial" pitchFamily="34" charset="-122"/>
-                <a:cs typeface="Arial" pitchFamily="34" charset="-120"/>
-              </a:rPr>
-              <a:t>Cost synergies</a:t>
-            </a:r>
-            <a:endParaRPr lang="en-US" sz="1000" dirty="0"/>
-          </a:p>
-        </p:txBody>
-      </p:sp>
-      <p:sp>
-        <p:nvSpPr>
-          <p:cNvPr id="25" name="Slide Number Placeholder 0"/>
-          <p:cNvSpPr>
-            <a:spLocks noGrp="1"/>
-          </p:cNvSpPr>
-          <p:nvPr>
-            <p:ph type="sldNum" sz="quarter" idx="4294967295"/>
-          </p:nvPr>
-        </p:nvSpPr>
-        <p:spPr>
-          <a:xfrm>
-            <a:off x="11109960" y="6473952"/>
-            <a:ext cx="800000" cy="300000"/>
-          </a:xfrm>
-          <a:prstGeom prst="rect">
-            <a:avLst/>
-          </a:prstGeom>
-          <a:extLst>
-            <a:ext uri="{C572A759-6A51-4108-AA02-DFA0A04FC94B}">
-              <ma14:wrappingTextBoxFlag xmlns:ma14="http://schemas.microsoft.com/office/mac/drawingml/2011/main" val="0"/>
-            </a:ext>
-          </a:extLst>
-        </p:spPr>
-        <p:txBody>
-          <a:bodyPr/>
-          <a:lstStyle>
-            <a:lvl1pPr>
-              <a:defRPr sz="900">
-                <a:solidFill>
-                  <a:srgbClr val="63666A"/>
-                </a:solidFill>
-                <a:latin typeface="Arial"/>
-                <a:ea typeface="Arial"/>
-                <a:cs typeface="Arial"/>
-              </a:defRPr>
-            </a:lvl1pPr>
-          </a:lstStyle>
-          <a:p>
-            <a:pPr algn="l"/>
-            <a:fld id="{F7021451-1387-4CA6-816F-3879F97B5CBC}" type="slidenum">
-              <a:rPr b="0" lang="en-US"/>
-              <a:t>5</a:t>
             </a:fld>
             <a:endParaRPr lang="en-US"/>
           </a:p>
